--- a/dissertation_defense_presentation.pptx
+++ b/dissertation_defense_presentation.pptx
@@ -539,25 +539,23 @@
           <a:bodyPr/>
           <a:lstStyle/>
           <a:p>
+            <a:pPr marL="171450" indent="-171450">
+              <a:buFont typeface="Arial" panose="020B0604020202020204" pitchFamily="34" charset="0"/>
+              <a:buChar char="•"/>
+            </a:pPr>
             <a:r>
               <a:rPr lang="en-GB" dirty="0"/>
-              <a:t>Here's a real example from my own model. Of the men who actually had heart disease, it correctly identified 93.5% of them. Of the women who actually had it — only 70%. Same model, same illness. A twenty-three point gap in who gets found. And here's the uncomfortable part. By the usual measure — a single overall score — this model scored 0.957. On paper, excellent. You'd be tempted to deploy it. The very number that makes it look ready is the number hiding the fact it's failing women. That gap — between </a:t>
-            </a:r>
-            <a:r>
-              <a:rPr lang="en-GB" i="1" dirty="0"/>
-              <a:t>looks accurate</a:t>
-            </a:r>
+              <a:t>Same model, two patients: men caught 93.5%, women only 70%</a:t>
+            </a:r>
+          </a:p>
+          <a:p>
+            <a:pPr marL="171450" indent="-171450">
+              <a:buFont typeface="Arial" panose="020B0604020202020204" pitchFamily="34" charset="0"/>
+              <a:buChar char="•"/>
+            </a:pPr>
             <a:r>
               <a:rPr lang="en-GB" dirty="0"/>
-              <a:t> and </a:t>
-            </a:r>
-            <a:r>
-              <a:rPr lang="en-GB" i="1" dirty="0"/>
-              <a:t>is actually safe for everyone</a:t>
-            </a:r>
-            <a:r>
-              <a:rPr lang="en-GB" dirty="0"/>
-              <a:t> — is what this project is about.</a:t>
+              <a:t>Judge it on that one number and you'd deploy it —  but it hides who it's failing</a:t>
             </a:r>
           </a:p>
         </p:txBody>
@@ -642,67 +640,10 @@
           <a:bodyPr/>
           <a:lstStyle/>
           <a:p>
-            <a:pPr rtl="0"/>
-            <a:r>
-              <a:rPr lang="en-GB" b="1" dirty="0"/>
-              <a:t>Open with the win — let it land before the caveat]</a:t>
-            </a:r>
-            <a:endParaRPr lang="en-GB" dirty="0"/>
-          </a:p>
-          <a:p>
-            <a:pPr rtl="0"/>
             <a:r>
               <a:rPr lang="en-GB" dirty="0"/>
-              <a:t>So did the mitigation work? Partly, and this is the honest picture. Female recall rose from 70% to 90%, while male recall held steady at 93.5%. So the intervention closed most of the visible detection gap between men and women, and it did so without sacrificing performance for men.</a:t>
-            </a:r>
-          </a:p>
-          <a:p>
-            <a:pPr rtl="0"/>
-            <a:r>
-              <a:rPr lang="en-GB" b="1" dirty="0"/>
-              <a:t>[The cost — state it plainly, don't hide it]</a:t>
-            </a:r>
-            <a:endParaRPr lang="en-GB" dirty="0"/>
-          </a:p>
-          <a:p>
-            <a:pPr rtl="0"/>
-            <a:r>
-              <a:rPr lang="en-GB" dirty="0"/>
-              <a:t>That came at a small cost to overall accuracy: AUC-ROC moved from 0.957 to 0.895. A modest trade — a small drop in aggregate performance in exchange for a large gain in fairness for the under-served group. In a healthcare context, I'd argue that's a trade worth making.</a:t>
-            </a:r>
-          </a:p>
-          <a:p>
-            <a:pPr rtl="0"/>
-            <a:r>
-              <a:rPr lang="en-GB" b="1" dirty="0"/>
-              <a:t>[The turn — this is what the title means]</a:t>
-            </a:r>
-            <a:endParaRPr lang="en-GB" dirty="0"/>
-          </a:p>
-          <a:p>
-            <a:pPr rtl="0"/>
-            <a:r>
-              <a:rPr lang="en-GB" dirty="0"/>
-              <a:t>But here's why the title says the gap narrowed rather than closed. What you're seeing in these bars is recall — the detection rate. And on recall, the groups are now close. The formal fairness measures tell a more cautious story: both of them improved, but neither cleared the 0.10 limit. So bias suppression moved up to partial, not a full pass.</a:t>
-            </a:r>
-          </a:p>
-          <a:p>
-            <a:pPr rtl="0"/>
-            <a:r>
-              <a:rPr lang="en-GB" b="1" dirty="0"/>
-              <a:t>[Hand off — set up the next slide without spending its content]</a:t>
-            </a:r>
-            <a:endParaRPr lang="en-GB" dirty="0"/>
-          </a:p>
-          <a:p>
-            <a:pPr rtl="0"/>
-            <a:r>
-              <a:rPr lang="en-GB" dirty="0"/>
-              <a:t>And those two formal measures didn't move equally, which is revealing. So let me take the two of them separately on the next slide, because the difference between them says something important about what the mitigation actually did.</a:t>
-            </a:r>
-          </a:p>
-          <a:p>
-            <a:endParaRPr lang="en-GB" dirty="0"/>
+              <a:t>Normal training just chases accuracy. Fairness-aware training adds a second goal — don't be much worse for one group than another — so the model balances both as it learns</a:t>
+            </a:r>
           </a:p>
         </p:txBody>
       </p:sp>
@@ -723,7 +664,7 @@
           <a:p>
             <a:fld id="{50DC7DE9-ACFA-4D31-A3BC-33B1D466B041}" type="slidenum">
               <a:rPr lang="en-GB" smtClean="0"/>
-              <a:t>13</a:t>
+              <a:t>12</a:t>
             </a:fld>
             <a:endParaRPr lang="en-GB"/>
           </a:p>
@@ -732,7 +673,7 @@
     </p:spTree>
     <p:extLst>
       <p:ext uri="{BB962C8B-B14F-4D97-AF65-F5344CB8AC3E}">
-        <p14:creationId xmlns:p14="http://schemas.microsoft.com/office/powerpoint/2010/main" val="227798485"/>
+        <p14:creationId xmlns:p14="http://schemas.microsoft.com/office/powerpoint/2010/main" val="1362283869"/>
       </p:ext>
     </p:extLst>
   </p:cSld>
@@ -786,111 +727,6 @@
           <a:bodyPr/>
           <a:lstStyle/>
           <a:p>
-            <a:pPr rtl="0"/>
-            <a:r>
-              <a:rPr lang="en-GB" b="1" dirty="0"/>
-              <a:t>Set up the slide — two criteria, shown side by side]</a:t>
-            </a:r>
-            <a:endParaRPr lang="en-GB" dirty="0"/>
-          </a:p>
-          <a:p>
-            <a:pPr rtl="0"/>
-            <a:r>
-              <a:rPr lang="en-GB" dirty="0"/>
-              <a:t>So after mitigation, two criteria improved from fail to partial. Let me take them one at a time.</a:t>
-            </a:r>
-          </a:p>
-          <a:p>
-            <a:pPr rtl="0"/>
-            <a:r>
-              <a:rPr lang="en-GB" b="1" dirty="0"/>
-              <a:t>[Bias suppression card — and deliver the "why they differ" insight]</a:t>
-            </a:r>
-            <a:endParaRPr lang="en-GB" dirty="0"/>
-          </a:p>
-          <a:p>
-            <a:pPr rtl="0"/>
-            <a:r>
-              <a:rPr lang="en-GB" dirty="0"/>
-              <a:t>First, bias suppression, measured by two formal fairness metrics. Both improved, but they behaved very differently, and that difference is revealing. Equalised odds difference dropped sharply, from 0.235 to 0.120 — it more than halved. Demographic parity difference barely moved, from 0.457 to 0.380.</a:t>
-            </a:r>
-          </a:p>
-          <a:p>
-            <a:pPr rtl="0"/>
-            <a:r>
-              <a:rPr lang="en-GB" dirty="0"/>
-              <a:t>The reason is what the mitigation actually optimised. I constrained the model on equalised odds specifically, so that's the metric that responded strongly. Demographic parity wasn't the optimisation target, so it improved only slightly as a side effect. In other words, the mitigation did exactly what it was told to do — it moved the metric it was constrained on. But even the one it targeted directly still didn't clear the 0.10 line. So bias suppression reaches partial, not pass.</a:t>
-            </a:r>
-          </a:p>
-          <a:p>
-            <a:pPr rtl="0"/>
-            <a:r>
-              <a:rPr lang="en-GB" b="1" dirty="0"/>
-              <a:t>[Correctability card — explain the denominator growth]</a:t>
-            </a:r>
-            <a:endParaRPr lang="en-GB" dirty="0"/>
-          </a:p>
-          <a:p>
-            <a:pPr rtl="0"/>
-            <a:r>
-              <a:rPr lang="en-GB" dirty="0"/>
-              <a:t>Second, correctability. This one needs a word of explanation, because the numbers look odd at first. At baseline it met three of seven checklist items. After mitigation it meets four of eight. The denominator grew because the mitigation itself </a:t>
-            </a:r>
-            <a:r>
-              <a:rPr lang="en-GB" i="1" dirty="0"/>
-              <a:t>added</a:t>
-            </a:r>
-            <a:r>
-              <a:rPr lang="en-GB" dirty="0"/>
-              <a:t> a new item to the checklist — the confidence-flagging step is a new oversight mechanism that didn't exist before, so it becomes a new thing to assess. So the model didn't just tick one more box on a fixed list; it earned a new safeguard while the bar it's measured against got longer. It improved, but it's still below the 80% mark, so correctability is also partial.</a:t>
-            </a:r>
-          </a:p>
-          <a:p>
-            <a:pPr rtl="0"/>
-            <a:r>
-              <a:rPr lang="en-GB" b="1" dirty="0"/>
-              <a:t>[The honest caveat — representativeness unchanged]</a:t>
-            </a:r>
-            <a:endParaRPr lang="en-GB" dirty="0"/>
-          </a:p>
-          <a:p>
-            <a:pPr rtl="0"/>
-            <a:r>
-              <a:rPr lang="en-GB" dirty="0"/>
-              <a:t>And representativeness didn't move at all. It stayed at 0.64, exactly where it started, because as I said earlier, mitigation cannot manufacture data. Fixing that requires collecting more female patients, not adjusting the model.</a:t>
-            </a:r>
-          </a:p>
-          <a:p>
-            <a:pPr rtl="0"/>
-            <a:r>
-              <a:rPr lang="en-GB" b="1" dirty="0"/>
-              <a:t>[Close on the full scorecard]</a:t>
-            </a:r>
-            <a:endParaRPr lang="en-GB" dirty="0"/>
-          </a:p>
-          <a:p>
-            <a:pPr rtl="0"/>
-            <a:r>
-              <a:rPr lang="en-GB" dirty="0"/>
-              <a:t>So the picture after mitigation is: three criteria pass, two are partial, and one still fails. The model is meaningfully fairer than it was, but it is not fully procedurally fair. Improvement, not resolution.</a:t>
-            </a:r>
-          </a:p>
-          <a:p>
-            <a:pPr rtl="0"/>
-            <a:r>
-              <a:rPr lang="en-GB" b="1" dirty="0"/>
-              <a:t>[Optional bridge, depending on what's next]</a:t>
-            </a:r>
-            <a:endParaRPr lang="en-GB" dirty="0"/>
-          </a:p>
-          <a:p>
-            <a:pPr rtl="0"/>
-            <a:r>
-              <a:rPr lang="en-GB" dirty="0"/>
-              <a:t>And that one remaining failure, representativeness, along with the oversight gap, turns out to matter a great deal when we look at what the public actually expects.</a:t>
-            </a:r>
-          </a:p>
-          <a:p>
             <a:endParaRPr lang="en-GB" dirty="0"/>
           </a:p>
         </p:txBody>
@@ -912,7 +748,7 @@
           <a:p>
             <a:fld id="{50DC7DE9-ACFA-4D31-A3BC-33B1D466B041}" type="slidenum">
               <a:rPr lang="en-GB" smtClean="0"/>
-              <a:t>14</a:t>
+              <a:t>13</a:t>
             </a:fld>
             <a:endParaRPr lang="en-GB"/>
           </a:p>
@@ -921,7 +757,7 @@
     </p:spTree>
     <p:extLst>
       <p:ext uri="{BB962C8B-B14F-4D97-AF65-F5344CB8AC3E}">
-        <p14:creationId xmlns:p14="http://schemas.microsoft.com/office/powerpoint/2010/main" val="3405998682"/>
+        <p14:creationId xmlns:p14="http://schemas.microsoft.com/office/powerpoint/2010/main" val="227798485"/>
       </p:ext>
     </p:extLst>
   </p:cSld>
@@ -975,35 +811,29 @@
           <a:bodyPr/>
           <a:lstStyle/>
           <a:p>
-            <a:pPr rtl="0"/>
             <a:r>
               <a:rPr lang="en-GB" dirty="0"/>
-              <a:t>I ran an online survey of 325 members of the public. Distribution was through snowball sampling — I posted it on social media asking people to share it on, and I placed physical QR codes around the School of Computing building and student accommodation here at Newcastle. Responses came in through Google Forms; participation was voluntary and anonymous, no identifying information was collected, and the survey had ethics-board approval before it went out. Every question was mapped back to one of Leventhal's six procedural fairness criteria, so the survey measures the same framework as the pipeline, just from the public's side rather than the model's.</a:t>
-            </a:r>
-          </a:p>
-          <a:p>
-            <a:pPr rtl="0"/>
+              <a:t>The checklist grew </a:t>
+            </a:r>
+            <a:r>
+              <a:rPr lang="en-GB" dirty="0" err="1"/>
+              <a:t>bc</a:t>
+            </a:r>
             <a:r>
               <a:rPr lang="en-GB" dirty="0"/>
-              <a:t>The headline is on the slide: human oversight and transparency dominate. Ninety-six percent want to be told when AI is used in their care; ninety-three percent want the right to challenge an AI decision; ninety-two percent want a human doctor involved regardless of how accurate the system is. And you'll notice the tags underneath — two of those three map to correctability, and one to ethicality. That's not incidental. It's the thread I pick up on the next slide.</a:t>
-            </a:r>
-          </a:p>
-          <a:p>
-            <a:pPr rtl="0"/>
+              <a:t> mitigation added a new capability, </a:t>
+            </a:r>
+            <a:r>
+              <a:rPr lang="en-GB" i="1" dirty="0"/>
+              <a:t>which became a new thing worth measuring </a:t>
+            </a:r>
+            <a:endParaRPr lang="en-GB" dirty="0"/>
+          </a:p>
+          <a:p>
             <a:r>
               <a:rPr lang="en-GB" dirty="0"/>
-              <a:t>The meaning of this slide is that fairness, to the public, is not mainly about accuracy. It's about having a say — being informed, and being able to push back. That's a procedural expectation, not a performance one, which is exactly what this project argues fairness in healthcare AI has to include.</a:t>
-            </a:r>
-          </a:p>
-          <a:p>
-            <a:pPr rtl="0"/>
-            <a:r>
-              <a:rPr lang="en-GB" dirty="0"/>
-              <a:t>I'll show the full survey results — all six criteria, including data-consent and the accuracy-versus-equal-performance trade-off — live in the dashboard demo shortly. And I'll be honest about the sample then too: it skewed female and non-technical, which I return to in the limitations. But the core signal, the demand for oversight, is strong and consistent across the whole sample.</a:t>
-            </a:r>
-          </a:p>
-          <a:p>
-            <a:endParaRPr lang="en-GB" dirty="0"/>
+              <a:t>Changing correctability makes it hard to compare before and after </a:t>
+            </a:r>
           </a:p>
         </p:txBody>
       </p:sp>
@@ -1024,7 +854,7 @@
           <a:p>
             <a:fld id="{50DC7DE9-ACFA-4D31-A3BC-33B1D466B041}" type="slidenum">
               <a:rPr lang="en-GB" smtClean="0"/>
-              <a:t>15</a:t>
+              <a:t>14</a:t>
             </a:fld>
             <a:endParaRPr lang="en-GB"/>
           </a:p>
@@ -1033,7 +863,7 @@
     </p:spTree>
     <p:extLst>
       <p:ext uri="{BB962C8B-B14F-4D97-AF65-F5344CB8AC3E}">
-        <p14:creationId xmlns:p14="http://schemas.microsoft.com/office/powerpoint/2010/main" val="1563308362"/>
+        <p14:creationId xmlns:p14="http://schemas.microsoft.com/office/powerpoint/2010/main" val="3405998682"/>
       </p:ext>
     </p:extLst>
   </p:cSld>
@@ -1089,101 +919,148 @@
           <a:p>
             <a:pPr rtl="0"/>
             <a:r>
+              <a:rPr lang="en-GB" b="1" dirty="0"/>
+              <a:t>Reached people through snowball sampling</a:t>
+            </a:r>
+            <a:r>
               <a:rPr lang="en-GB" dirty="0"/>
-              <a:t>[Bridge from the survey slide]</a:t>
+              <a:t> </a:t>
             </a:r>
           </a:p>
           <a:p>
             <a:pPr rtl="0"/>
             <a:r>
+              <a:rPr lang="en-GB" b="1" dirty="0"/>
+              <a:t>Collected through Google Forms</a:t>
+            </a:r>
+            <a:r>
               <a:rPr lang="en-GB" dirty="0"/>
-              <a:t>So I now have two separate bodies of evidence: a technical assessment of the pipeline, and a survey of what the public expects. This slide is where they meet — and they meet more precisely than I expected when I set out.</a:t>
+              <a:t> → </a:t>
             </a:r>
           </a:p>
           <a:p>
             <a:pPr rtl="0"/>
             <a:r>
+              <a:rPr lang="en-GB" b="1" dirty="0"/>
+              <a:t>question mapped to one of Leventhal's six criteria</a:t>
+            </a:r>
+            <a:endParaRPr lang="en-GB" dirty="0"/>
+          </a:p>
+          <a:p>
+            <a:pPr rtl="0"/>
+            <a:r>
+              <a:rPr lang="en-GB" b="1" dirty="0"/>
+              <a:t>One overall statement about the survey:</a:t>
+            </a:r>
+            <a:endParaRPr lang="en-GB" dirty="0"/>
+          </a:p>
+          <a:p>
+            <a:pPr rtl="0"/>
+            <a:r>
               <a:rPr lang="en-GB" dirty="0"/>
-              <a:t>[Walk the table — take one row at a time, don't rush it]</a:t>
-            </a:r>
-          </a:p>
-          <a:p>
-            <a:pPr rtl="0"/>
+              <a:t>The survey gives me a second, independent line of evidence — instead of only asking whether the model </a:t>
+            </a:r>
+            <a:r>
+              <a:rPr lang="en-GB" i="1" dirty="0"/>
+              <a:t>is</a:t>
+            </a:r>
             <a:r>
               <a:rPr lang="en-GB" dirty="0"/>
-              <a:t>The correctability assessment is a checklist of eight items. After mitigation the pipeline met four of them. Two of the four it did not meet are these.</a:t>
-            </a:r>
-          </a:p>
-          <a:p>
-            <a:pPr rtl="0"/>
+              <a:t> fair, it asks what the public actually </a:t>
+            </a:r>
+            <a:r>
+              <a:rPr lang="en-GB" i="1" dirty="0"/>
+              <a:t>expects</a:t>
+            </a:r>
             <a:r>
               <a:rPr lang="en-GB" dirty="0"/>
-              <a:t>The first is a patient challenge mechanism — a route by which someone can contest a decision made about them. The pipeline has no such mechanism. In the survey, ninety-three percent of respondents said patients should have the right to challenge an AI decision about their health.</a:t>
-            </a:r>
-          </a:p>
-          <a:p>
-            <a:pPr rtl="0"/>
-            <a:r>
-              <a:rPr lang="en-GB" dirty="0"/>
-              <a:t>The second is a clinician override mechanism — a way for a doctor to overrule the model. Again, absent. And ninety-two percent said a human doctor should be involved regardless of how accurate the system is.</a:t>
-            </a:r>
-          </a:p>
-          <a:p>
-            <a:pPr rtl="0"/>
-            <a:r>
-              <a:rPr lang="en-GB" dirty="0"/>
-              <a:t>[The point — say this slowly, it's the thesis]</a:t>
-            </a:r>
-          </a:p>
-          <a:p>
-            <a:pPr rtl="0"/>
-            <a:r>
-              <a:rPr lang="en-GB" dirty="0"/>
-              <a:t>So this isn't a loose thematic resemblance. The two things people most consistently asked for are, item for item, two things the checklist records as absent. The gap the public cares about is the gap the pipeline actually has.</a:t>
-            </a:r>
-          </a:p>
-          <a:p>
-            <a:pPr rtl="0"/>
-            <a:r>
-              <a:rPr lang="en-GB" dirty="0"/>
-              <a:t>[The epistemic caveat — say it before anyone asks]</a:t>
-            </a:r>
-          </a:p>
-          <a:p>
-            <a:pPr rtl="0"/>
-            <a:r>
-              <a:rPr lang="en-GB" dirty="0"/>
-              <a:t>I want to be careful about what this does and doesn't show. These are two independent sources, and one does not validate the other. A survey cannot tell me whether my model is fair, and my model cannot tell me what the public is entitled to expect. What I can say is that two different kinds of evidence, gathered in completely different ways, converge on the same missing capability. That convergence is what makes correctability the priority I take forward into the recommendations.</a:t>
-            </a:r>
-          </a:p>
-          <a:p>
-            <a:pPr rtl="0"/>
-            <a:r>
-              <a:rPr lang="en-GB" dirty="0"/>
-              <a:t>[The honest limit]</a:t>
-            </a:r>
-          </a:p>
-          <a:p>
-            <a:pPr rtl="0"/>
-            <a:r>
-              <a:rPr lang="en-GB" dirty="0"/>
-              <a:t>And correctability is a sociotechnical criterion, not a technical one. That matters. It isn't something I can fix by changing the model — it requires institutional design: override routes, challenge processes, audit trails, version control. That's beyond what this project could implement, which is exactly why it appears as a recommendation rather than a result.</a:t>
-            </a:r>
-          </a:p>
-          <a:p>
-            <a:pPr rtl="0"/>
-            <a:r>
-              <a:rPr lang="en-GB" dirty="0"/>
-              <a:t>[Bridge to limitations]</a:t>
-            </a:r>
-          </a:p>
-          <a:p>
-            <a:pPr rtl="0"/>
-            <a:r>
-              <a:rPr lang="en-GB" dirty="0"/>
-              <a:t>Before I get to those recommendations, though, I want to be straight about what this study doesn't settle.</a:t>
-            </a:r>
-          </a:p>
+              <a:t> fairness to mean, measured against the same six criteria.</a:t>
+            </a:r>
+          </a:p>
+          <a:p>
+            <a:endParaRPr lang="en-GB" dirty="0"/>
+          </a:p>
+        </p:txBody>
+      </p:sp>
+      <p:sp>
+        <p:nvSpPr>
+          <p:cNvPr id="4" name="Slide Number Placeholder 3"/>
+          <p:cNvSpPr>
+            <a:spLocks noGrp="1"/>
+          </p:cNvSpPr>
+          <p:nvPr>
+            <p:ph type="sldNum" sz="quarter" idx="5"/>
+          </p:nvPr>
+        </p:nvSpPr>
+        <p:spPr/>
+        <p:txBody>
+          <a:bodyPr/>
+          <a:lstStyle/>
+          <a:p>
+            <a:fld id="{50DC7DE9-ACFA-4D31-A3BC-33B1D466B041}" type="slidenum">
+              <a:rPr lang="en-GB" smtClean="0"/>
+              <a:t>15</a:t>
+            </a:fld>
+            <a:endParaRPr lang="en-GB"/>
+          </a:p>
+        </p:txBody>
+      </p:sp>
+    </p:spTree>
+    <p:extLst>
+      <p:ext uri="{BB962C8B-B14F-4D97-AF65-F5344CB8AC3E}">
+        <p14:creationId xmlns:p14="http://schemas.microsoft.com/office/powerpoint/2010/main" val="1563308362"/>
+      </p:ext>
+    </p:extLst>
+  </p:cSld>
+  <p:clrMapOvr>
+    <a:masterClrMapping/>
+  </p:clrMapOvr>
+</p:notes>
+</file>
+
+<file path=ppt/notesSlides/notesSlide14.xml><?xml version="1.0" encoding="utf-8"?>
+<p:notes xmlns:a="http://schemas.openxmlformats.org/drawingml/2006/main" xmlns:r="http://schemas.openxmlformats.org/officeDocument/2006/relationships" xmlns:p="http://schemas.openxmlformats.org/presentationml/2006/main">
+  <p:cSld>
+    <p:spTree>
+      <p:nvGrpSpPr>
+        <p:cNvPr id="1" name=""/>
+        <p:cNvGrpSpPr/>
+        <p:nvPr/>
+      </p:nvGrpSpPr>
+      <p:grpSpPr>
+        <a:xfrm>
+          <a:off x="0" y="0"/>
+          <a:ext cx="0" cy="0"/>
+          <a:chOff x="0" y="0"/>
+          <a:chExt cx="0" cy="0"/>
+        </a:xfrm>
+      </p:grpSpPr>
+      <p:sp>
+        <p:nvSpPr>
+          <p:cNvPr id="2" name="Slide Image Placeholder 1"/>
+          <p:cNvSpPr>
+            <a:spLocks noGrp="1" noRot="1" noChangeAspect="1"/>
+          </p:cNvSpPr>
+          <p:nvPr>
+            <p:ph type="sldImg"/>
+          </p:nvPr>
+        </p:nvSpPr>
+        <p:spPr/>
+      </p:sp>
+      <p:sp>
+        <p:nvSpPr>
+          <p:cNvPr id="3" name="Notes Placeholder 2"/>
+          <p:cNvSpPr>
+            <a:spLocks noGrp="1"/>
+          </p:cNvSpPr>
+          <p:nvPr>
+            <p:ph type="body" idx="1"/>
+          </p:nvPr>
+        </p:nvSpPr>
+        <p:spPr/>
+        <p:txBody>
+          <a:bodyPr/>
+          <a:lstStyle/>
           <a:p>
             <a:endParaRPr lang="en-US" dirty="0"/>
           </a:p>
@@ -1269,41 +1146,61 @@
           <a:bodyPr/>
           <a:lstStyle/>
           <a:p>
+            <a:pPr rtl="0"/>
             <a:r>
               <a:rPr lang="en-GB" dirty="0"/>
-              <a:t>This is where I define what fairness actually means in this project. The foundation is Leventhal's 1980 procedural justice framework — six rules for what makes a </a:t>
-            </a:r>
-            <a:r>
-              <a:rPr lang="en-GB" i="1" dirty="0"/>
-              <a:t>decision process</a:t>
-            </a:r>
+              <a:t>My whole project comes down to one question: how can procedural fairness be defined, measured, and communicated in a healthcare prediction model?</a:t>
+            </a:r>
+          </a:p>
+          <a:p>
+            <a:pPr rtl="0"/>
             <a:r>
               <a:rPr lang="en-GB" dirty="0"/>
-              <a:t> fair,</a:t>
+              <a:t>Those three verbs structure everything that follows.</a:t>
+            </a:r>
+          </a:p>
+          <a:p>
+            <a:pPr rtl="0"/>
+            <a:r>
+              <a:rPr lang="en-GB" b="1" dirty="0"/>
+              <a:t>Define</a:t>
+            </a:r>
+            <a:r>
+              <a:rPr lang="en-GB" dirty="0"/>
+              <a:t> — I take Leventhal's procedural justice rules, written for human decisions, and translate them into fairness criteria for healthcare AI.</a:t>
+            </a:r>
+          </a:p>
+          <a:p>
+            <a:pPr rtl="0"/>
+            <a:r>
+              <a:rPr lang="en-GB" b="1" dirty="0"/>
+              <a:t>Measure</a:t>
+            </a:r>
+            <a:r>
+              <a:rPr lang="en-GB" dirty="0"/>
+              <a:t> — I turn those criteria into something testable: quantitative metrics for the technical rules, and a structured checklist for the ones that aren't purely technical.</a:t>
+            </a:r>
+          </a:p>
+          <a:p>
+            <a:pPr rtl="0"/>
+            <a:r>
+              <a:rPr lang="en-GB" b="1" dirty="0"/>
+              <a:t>Communicate</a:t>
+            </a:r>
+            <a:r>
+              <a:rPr lang="en-GB" dirty="0"/>
+              <a:t> — and because fairness only matters if people can see it, I present the results in a way that works for stakeholders whether or not they have a technical background — which is the dashboard.</a:t>
+            </a:r>
+          </a:p>
+          <a:p>
+            <a:pPr rtl="0"/>
+            <a:r>
+              <a:rPr lang="en-GB" dirty="0"/>
+              <a:t>So: define it, measure it, communicate it. Keep those three in mind — they're the thread through the rest of the talk.</a:t>
             </a:r>
           </a:p>
           <a:p>
             <a:endParaRPr lang="en-GB" dirty="0"/>
-          </a:p>
-          <a:p>
-            <a:r>
-              <a:rPr lang="en-GB" dirty="0"/>
-              <a:t>The important thing is that Leventhal wrote these for human decision-making people or managers, allocating resources between people. None of it was written with algorithms in mind. So the core of this work was translating each rule into something you can actually assess in a machine learning model.</a:t>
-            </a:r>
-          </a:p>
-          <a:p>
-            <a:r>
-              <a:rPr lang="en-GB" dirty="0"/>
-              <a:t>I'm not the first to adapt Leventhal for algorithms — </a:t>
-            </a:r>
-            <a:r>
-              <a:rPr lang="en-GB" dirty="0" err="1"/>
-              <a:t>Jabagi</a:t>
-            </a:r>
-            <a:r>
-              <a:rPr lang="en-GB" dirty="0"/>
-              <a:t> and colleagues did it in 2025 for algorithmic HR decisions, showing gig-workers' perceptions of whether hiring algorithms were procedurally fair.</a:t>
-            </a:r>
           </a:p>
         </p:txBody>
       </p:sp>
@@ -1324,7 +1221,7 @@
           <a:p>
             <a:fld id="{50DC7DE9-ACFA-4D31-A3BC-33B1D466B041}" type="slidenum">
               <a:rPr lang="en-GB" smtClean="0"/>
-              <a:t>5</a:t>
+              <a:t>4</a:t>
             </a:fld>
             <a:endParaRPr lang="en-GB"/>
           </a:p>
@@ -1333,7 +1230,7 @@
     </p:spTree>
     <p:extLst>
       <p:ext uri="{BB962C8B-B14F-4D97-AF65-F5344CB8AC3E}">
-        <p14:creationId xmlns:p14="http://schemas.microsoft.com/office/powerpoint/2010/main" val="586513705"/>
+        <p14:creationId xmlns:p14="http://schemas.microsoft.com/office/powerpoint/2010/main" val="2476467147"/>
       </p:ext>
     </p:extLst>
   </p:cSld>
@@ -1389,75 +1286,80 @@
           <a:p>
             <a:r>
               <a:rPr lang="en-GB" dirty="0"/>
-              <a:t>Before showing any results, I want to be transparent about how each criterion passes or fails </a:t>
-            </a:r>
-          </a:p>
-          <a:p>
-            <a:pPr rtl="0"/>
-            <a:r>
-              <a:rPr lang="en-GB" b="1" dirty="0"/>
-              <a:t>[The split — two borrowed, four mine]</a:t>
-            </a:r>
+              <a:t>This is where I define what fairness means → Leventhal's 1980 framework, six rules for a fair process </a:t>
+            </a:r>
+          </a:p>
+          <a:p>
             <a:endParaRPr lang="en-GB" dirty="0"/>
           </a:p>
           <a:p>
-            <a:pPr rtl="0"/>
             <a:r>
               <a:rPr lang="en-GB" dirty="0"/>
-              <a:t>Two of my six thresholds come from established sources. Accuracy uses 0.80, a common bar for a model that separates two groups well. Representativeness borrows the four-fifths rule from employment law. The other four, I set myself.</a:t>
-            </a:r>
-          </a:p>
-          <a:p>
-            <a:pPr rtl="0"/>
-            <a:r>
-              <a:rPr lang="en-GB" b="1" dirty="0"/>
-              <a:t>[Own it — this is the key bit, say it confidently]</a:t>
-            </a:r>
+              <a:t>Key thing: he wrote them for </a:t>
+            </a:r>
+            <a:r>
+              <a:rPr lang="en-GB" i="1" dirty="0"/>
+              <a:t>humans</a:t>
+            </a:r>
+            <a:r>
+              <a:rPr lang="en-GB" dirty="0"/>
+              <a:t> — managers deciding between people, not algorithms </a:t>
+            </a:r>
+          </a:p>
+          <a:p>
             <a:endParaRPr lang="en-GB" dirty="0"/>
           </a:p>
           <a:p>
-            <a:pPr rtl="0"/>
             <a:r>
               <a:rPr lang="en-GB" dirty="0"/>
-              <a:t>And I want to be honest about that. In fairness research there isn't one agreed threshold everyone uses. In fact, a lot of the literature says thresholds </a:t>
+              <a:t>So my job was translating each rule into something you can test in a model </a:t>
             </a:r>
             <a:r>
               <a:rPr lang="en-GB" i="1" dirty="0"/>
-              <a:t>should</a:t>
-            </a:r>
+              <a:t>(point at the table)</a:t>
+            </a:r>
+          </a:p>
+          <a:p>
+            <a:endParaRPr lang="en-GB" i="1" dirty="0"/>
+          </a:p>
+          <a:p>
             <a:r>
               <a:rPr lang="en-GB" dirty="0"/>
-              <a:t> depend on what the model is being used for and what the people affected actually care about. A fair bar for a film recommendation isn't the same as a fair bar for a heart-disease diagnosis. So rather than borrow a number and pretend it's a universal rule, I picked a clear, strict bar for each and explained my reasoning.</a:t>
-            </a:r>
-          </a:p>
-          <a:p>
-            <a:pPr rtl="0"/>
-            <a:r>
-              <a:rPr lang="en-GB" b="1" dirty="0"/>
-              <a:t>[One quick example]</a:t>
-            </a:r>
+              <a:t> Left column = his original wording, right column = my healthcare version </a:t>
+            </a:r>
+          </a:p>
+          <a:p>
             <a:endParaRPr lang="en-GB" dirty="0"/>
           </a:p>
           <a:p>
-            <a:pPr rtl="0"/>
             <a:r>
               <a:rPr lang="en-GB" dirty="0"/>
-              <a:t>For example, bias suppression. I set the limit at within 0.10 on both fairness measures. There's no field-wide standard for this, so I chose a demanding one — because in healthcare, a gap between groups matters more than it would somewhere low-stakes.</a:t>
-            </a:r>
-          </a:p>
-          <a:p>
-            <a:pPr rtl="0"/>
-            <a:r>
-              <a:rPr lang="en-GB" b="1" dirty="0"/>
-              <a:t>[Close — turn it into a strength]</a:t>
-            </a:r>
+              <a:t>Example: correctability </a:t>
+            </a:r>
+            <a:r>
+              <a:rPr lang="en-GB" i="1" dirty="0"/>
+              <a:t>(point to it)</a:t>
+            </a:r>
+            <a:r>
+              <a:rPr lang="en-GB" dirty="0"/>
+              <a:t> → for him, "review or appeal a decision"; for me, "can a clinician override it? is there an audit trail?“</a:t>
+            </a:r>
+          </a:p>
+          <a:p>
             <a:endParaRPr lang="en-GB" dirty="0"/>
           </a:p>
           <a:p>
-            <a:pPr rtl="0"/>
             <a:r>
               <a:rPr lang="en-GB" dirty="0"/>
-              <a:t>The important thing is that every threshold is stated openly, so anyone can disagree with a specific bar and re-run the assessment against their own. The framework doesn't depend on my exact numbers being right — it depends on them being clear </a:t>
+              <a:t> Not the first to adapt him — </a:t>
+            </a:r>
+            <a:r>
+              <a:rPr lang="en-GB" dirty="0" err="1"/>
+              <a:t>Jabagi</a:t>
+            </a:r>
+            <a:r>
+              <a:rPr lang="en-GB" dirty="0"/>
+              <a:t> did it for HR algorithms in 2025; I'm bringing it into healthcare</a:t>
             </a:r>
           </a:p>
         </p:txBody>
@@ -1469,7 +1371,7 @@
             <a:spLocks noGrp="1"/>
           </p:cNvSpPr>
           <p:nvPr>
-            <p:ph type="sldNum" sz="quarter" idx="10"/>
+            <p:ph type="sldNum" sz="quarter" idx="5"/>
           </p:nvPr>
         </p:nvSpPr>
         <p:spPr/>
@@ -1477,18 +1379,18 @@
           <a:bodyPr/>
           <a:lstStyle/>
           <a:p>
-            <a:fld id="{F7021451-1387-4CA6-816F-3879F97B5CBC}" type="slidenum">
-              <a:rPr lang="en-US"/>
-              <a:t>6</a:t>
+            <a:fld id="{50DC7DE9-ACFA-4D31-A3BC-33B1D466B041}" type="slidenum">
+              <a:rPr lang="en-GB" smtClean="0"/>
+              <a:t>5</a:t>
             </a:fld>
-            <a:endParaRPr lang="en-US"/>
+            <a:endParaRPr lang="en-GB"/>
           </a:p>
         </p:txBody>
       </p:sp>
     </p:spTree>
     <p:extLst>
       <p:ext uri="{BB962C8B-B14F-4D97-AF65-F5344CB8AC3E}">
-        <p14:creationId xmlns:p14="http://schemas.microsoft.com/office/powerpoint/2010/main" val="1024086991"/>
+        <p14:creationId xmlns:p14="http://schemas.microsoft.com/office/powerpoint/2010/main" val="586513705"/>
       </p:ext>
     </p:extLst>
   </p:cSld>
@@ -1542,67 +1444,48 @@
           <a:bodyPr/>
           <a:lstStyle/>
           <a:p>
-            <a:pPr rtl="0"/>
             <a:r>
               <a:rPr lang="en-GB" dirty="0"/>
-              <a:t>A quick word on the model itself. The task is predicting whether a patient has heart disease, using the UCI Heart Disease dataset — 918 patient records.</a:t>
-            </a:r>
-          </a:p>
-          <a:p>
-            <a:pPr rtl="0"/>
+              <a:t>Before scoring anything, I had to define what "passing" means for each of the six criteria</a:t>
+            </a:r>
+          </a:p>
+          <a:p>
+            <a:endParaRPr lang="en-GB" dirty="0"/>
+          </a:p>
+          <a:p>
             <a:r>
               <a:rPr lang="en-GB" dirty="0"/>
-              <a:t>The model is a logistic regression classifier. I chose it deliberately: its coefficients are transparent, so you can see exactly how each measurement influences a prediction. For a project </a:t>
+              <a:t>Some bars are standard </a:t>
             </a:r>
             <a:r>
               <a:rPr lang="en-GB" i="1" dirty="0"/>
-              <a:t>about</a:t>
+              <a:t>(point to Accuracy)</a:t>
             </a:r>
             <a:r>
               <a:rPr lang="en-GB" dirty="0"/>
-              <a:t> fairness and accountability, an interpretable model matters more than squeezing out a bit more accuracy from something you can't inspect.</a:t>
-            </a:r>
-          </a:p>
-          <a:p>
-            <a:pPr rtl="0"/>
-            <a:r>
-              <a:rPr lang="en-GB" b="1" dirty="0"/>
-              <a:t>[gesture along the pipeline]</a:t>
-            </a:r>
+              <a:t> → AUC 0.80 is a recognised convention </a:t>
+            </a:r>
+          </a:p>
+          <a:p>
             <a:endParaRPr lang="en-GB" dirty="0"/>
           </a:p>
           <a:p>
-            <a:pPr rtl="0"/>
+            <a:r>
+              <a:rPr lang="en-GB" dirty="0" err="1"/>
+              <a:t>thers</a:t>
+            </a:r>
             <a:r>
               <a:rPr lang="en-GB" dirty="0"/>
-              <a:t>The workflow is straightforward: the data is split into training and test sets, the model is assessed against all six criteria, two mitigations are applied to the problems that surfaced, and then everything is re-tested on all six so the before-and-after is like-for-like.</a:t>
-            </a:r>
-          </a:p>
-          <a:p>
-            <a:pPr rtl="0"/>
-            <a:r>
-              <a:rPr lang="en-GB" b="1" dirty="0"/>
-              <a:t>[transition line into Slide B]</a:t>
-            </a:r>
-            <a:endParaRPr lang="en-GB" dirty="0"/>
-          </a:p>
-          <a:p>
-            <a:pPr rtl="0"/>
+              <a:t> I set myself </a:t>
+            </a:r>
+            <a:r>
+              <a:rPr lang="en-GB" i="1" dirty="0"/>
+              <a:t>(point to the right column)</a:t>
+            </a:r>
             <a:r>
               <a:rPr lang="en-GB" dirty="0"/>
-              <a:t>But the details of </a:t>
-            </a:r>
-            <a:r>
-              <a:rPr lang="en-GB" i="1" dirty="0"/>
-              <a:t>how</a:t>
-            </a:r>
-            <a:r>
-              <a:rPr lang="en-GB" dirty="0"/>
-              <a:t> the model was built matter as much as what it is — so let me highlight three decisions that protect the analysis.</a:t>
-            </a:r>
-          </a:p>
-          <a:p>
-            <a:endParaRPr lang="en-GB" dirty="0"/>
+              <a:t> → labelled "researcher-defined" </a:t>
+            </a:r>
           </a:p>
         </p:txBody>
       </p:sp>
@@ -1613,7 +1496,7 @@
             <a:spLocks noGrp="1"/>
           </p:cNvSpPr>
           <p:nvPr>
-            <p:ph type="sldNum" sz="quarter" idx="5"/>
+            <p:ph type="sldNum" sz="quarter" idx="10"/>
           </p:nvPr>
         </p:nvSpPr>
         <p:spPr/>
@@ -1621,18 +1504,18 @@
           <a:bodyPr/>
           <a:lstStyle/>
           <a:p>
-            <a:fld id="{50DC7DE9-ACFA-4D31-A3BC-33B1D466B041}" type="slidenum">
-              <a:rPr lang="en-GB" smtClean="0"/>
-              <a:t>7</a:t>
+            <a:fld id="{F7021451-1387-4CA6-816F-3879F97B5CBC}" type="slidenum">
+              <a:rPr lang="en-US"/>
+              <a:t>6</a:t>
             </a:fld>
-            <a:endParaRPr lang="en-GB"/>
+            <a:endParaRPr lang="en-US"/>
           </a:p>
         </p:txBody>
       </p:sp>
     </p:spTree>
     <p:extLst>
       <p:ext uri="{BB962C8B-B14F-4D97-AF65-F5344CB8AC3E}">
-        <p14:creationId xmlns:p14="http://schemas.microsoft.com/office/powerpoint/2010/main" val="3772037040"/>
+        <p14:creationId xmlns:p14="http://schemas.microsoft.com/office/powerpoint/2010/main" val="1024086991"/>
       </p:ext>
     </p:extLst>
   </p:cSld>
@@ -1686,96 +1569,6 @@
           <a:bodyPr/>
           <a:lstStyle/>
           <a:p>
-            <a:pPr rtl="0"/>
-            <a:r>
-              <a:rPr lang="en-GB" dirty="0"/>
-              <a:t>Three choices here are what make this a careful fairness analysis. Each one closes a gap that could otherwise undermine the results.</a:t>
-            </a:r>
-          </a:p>
-          <a:p>
-            <a:pPr rtl="0"/>
-            <a:r>
-              <a:rPr lang="en-GB" b="1" dirty="0"/>
-              <a:t>[Point 1 — leakage]</a:t>
-            </a:r>
-            <a:endParaRPr lang="en-GB" dirty="0"/>
-          </a:p>
-          <a:p>
-            <a:pPr rtl="0"/>
-            <a:r>
-              <a:rPr lang="en-GB" dirty="0"/>
-              <a:t>First, no data leakage. Missing values were filled in and the data scaled using only the training set. Everything was wrapped in a single pipeline so that separation is guaranteed, not just intended.</a:t>
-            </a:r>
-          </a:p>
-          <a:p>
-            <a:pPr rtl="0"/>
-            <a:r>
-              <a:rPr lang="en-GB" b="1" dirty="0"/>
-              <a:t>[optional extra-credit detail — only if confident on time]</a:t>
-            </a:r>
-            <a:endParaRPr lang="en-GB" dirty="0"/>
-          </a:p>
-          <a:p>
-            <a:pPr rtl="0"/>
-            <a:r>
-              <a:rPr lang="en-GB" dirty="0"/>
-              <a:t>One refinement: missing cholesterol and blood pressure were filled using the median </a:t>
-            </a:r>
-            <a:r>
-              <a:rPr lang="en-GB" i="1" dirty="0"/>
-              <a:t>for that patient's sex</a:t>
-            </a:r>
-            <a:r>
-              <a:rPr lang="en-GB" dirty="0"/>
-              <a:t>, not a global median — because those baselines genuinely differ between men and women, and a single median would distort both groups.</a:t>
-            </a:r>
-          </a:p>
-          <a:p>
-            <a:pPr rtl="0"/>
-            <a:r>
-              <a:rPr lang="en-GB" b="1" dirty="0"/>
-              <a:t>[Point 2 — the split]</a:t>
-            </a:r>
-            <a:endParaRPr lang="en-GB" dirty="0"/>
-          </a:p>
-          <a:p>
-            <a:pPr rtl="0"/>
-            <a:r>
-              <a:rPr lang="en-GB" dirty="0"/>
-              <a:t>Second, the split protects the smallest group. Female patients are a minority in this data, so a random split could have left very few of them in the test set — making any fairness estimate for women pure luck. By balancing the split on both outcome and sex, I guaranteed the test set a representative share of female patients. It doesn't make the female sample large — I'll come back to that in the limitations — but it means the design didn't leave subgroup fairness to chance.</a:t>
-            </a:r>
-          </a:p>
-          <a:p>
-            <a:pPr rtl="0"/>
-            <a:r>
-              <a:rPr lang="en-GB" b="1" dirty="0"/>
-              <a:t>[Point 3 — keeping sex and age]</a:t>
-            </a:r>
-            <a:endParaRPr lang="en-GB" dirty="0"/>
-          </a:p>
-          <a:p>
-            <a:pPr rtl="0"/>
-            <a:r>
-              <a:rPr lang="en-GB" dirty="0"/>
-              <a:t>Third, sex and age were kept as inputs on purpose. It's tempting to think removing them makes a model fairer — but it doesn't. The model would just relearn those patterns through correlated clinical measurements, only now invisibly. Keeping them in means the effect is out in the open where it can be measured and addressed, rather than hidden.</a:t>
-            </a:r>
-          </a:p>
-          <a:p>
-            <a:pPr rtl="0"/>
-            <a:r>
-              <a:rPr lang="en-GB" b="1" dirty="0"/>
-              <a:t>[close]</a:t>
-            </a:r>
-            <a:endParaRPr lang="en-GB" dirty="0"/>
-          </a:p>
-          <a:p>
-            <a:pPr rtl="0"/>
-            <a:r>
-              <a:rPr lang="en-GB" dirty="0"/>
-              <a:t>Together, these three mean that when we look at the fairness results next, we can trust that the gaps we see are real properties of the model — not artefacts of how it was built.</a:t>
-            </a:r>
-          </a:p>
-          <a:p>
             <a:endParaRPr lang="en-GB" dirty="0"/>
           </a:p>
         </p:txBody>
@@ -1797,7 +1590,7 @@
           <a:p>
             <a:fld id="{50DC7DE9-ACFA-4D31-A3BC-33B1D466B041}" type="slidenum">
               <a:rPr lang="en-GB" smtClean="0"/>
-              <a:t>8</a:t>
+              <a:t>7</a:t>
             </a:fld>
             <a:endParaRPr lang="en-GB"/>
           </a:p>
@@ -1806,7 +1599,7 @@
     </p:spTree>
     <p:extLst>
       <p:ext uri="{BB962C8B-B14F-4D97-AF65-F5344CB8AC3E}">
-        <p14:creationId xmlns:p14="http://schemas.microsoft.com/office/powerpoint/2010/main" val="1319403379"/>
+        <p14:creationId xmlns:p14="http://schemas.microsoft.com/office/powerpoint/2010/main" val="3772037040"/>
       </p:ext>
     </p:extLst>
   </p:cSld>
@@ -1860,121 +1653,51 @@
           <a:bodyPr/>
           <a:lstStyle/>
           <a:p>
-            <a:pPr rtl="0"/>
-            <a:r>
-              <a:rPr lang="en-GB" b="1" dirty="0"/>
-              <a:t>[Start with the impressive number — let them feel good about the model first]</a:t>
-            </a:r>
-            <a:endParaRPr lang="en-GB" dirty="0"/>
-          </a:p>
-          <a:p>
-            <a:pPr rtl="0"/>
             <a:r>
               <a:rPr lang="en-GB" dirty="0"/>
-              <a:t>So how did the model do? On accuracy, very well. Its AUC-ROC was 0.957, comfortably above the 0.80 bar — that means it's strong at telling apart patients who have heart disease from those who don't. On the face of it, this is a model you'd be happy with.</a:t>
-            </a:r>
-          </a:p>
-          <a:p>
-            <a:pPr rtl="0"/>
-            <a:r>
-              <a:rPr lang="en-GB" b="1" dirty="0"/>
-              <a:t>[The pivot — this is the turn, slow down here]</a:t>
-            </a:r>
-            <a:endParaRPr lang="en-GB" dirty="0"/>
-          </a:p>
-          <a:p>
-            <a:pPr rtl="0"/>
-            <a:r>
-              <a:rPr lang="en-GB" dirty="0"/>
-              <a:t>But accuracy was only one of six criteria. And when we score the model against all six…</a:t>
-            </a:r>
-          </a:p>
-          <a:p>
-            <a:pPr rtl="0"/>
-            <a:r>
-              <a:rPr lang="en-GB" b="1" dirty="0"/>
-              <a:t>[gesture to the dots]</a:t>
-            </a:r>
-            <a:endParaRPr lang="en-GB" dirty="0"/>
-          </a:p>
-          <a:p>
-            <a:pPr rtl="0"/>
-            <a:r>
-              <a:rPr lang="en-GB" dirty="0"/>
-              <a:t>…it passes three, and fails three. It's accurate, it's consistent, and it meets the baseline ethical checks. But it fails on bias suppression, on representativeness, and on correctability.</a:t>
-            </a:r>
-          </a:p>
-          <a:p>
-            <a:pPr rtl="0"/>
-            <a:r>
-              <a:rPr lang="en-GB" b="1" dirty="0"/>
-              <a:t>[Land the message — say this clearly, it's the whole slide]</a:t>
-            </a:r>
-            <a:endParaRPr lang="en-GB" dirty="0"/>
-          </a:p>
-          <a:p>
-            <a:pPr rtl="0"/>
-            <a:r>
-              <a:rPr lang="en-GB" dirty="0"/>
-              <a:t>So this is the heart of the problem. If you judged this model the way models are usually judged — on accuracy alone — it looks ready to use. Look at the full picture, and half the fairness criteria are failing. That gap between how good it </a:t>
-            </a:r>
-            <a:r>
-              <a:rPr lang="en-GB" i="1" dirty="0"/>
-              <a:t>looks</a:t>
-            </a:r>
-            <a:r>
-              <a:rPr lang="en-GB" dirty="0"/>
-              <a:t> and how fair it actually </a:t>
-            </a:r>
-            <a:r>
-              <a:rPr lang="en-GB" i="1" dirty="0"/>
-              <a:t>is</a:t>
-            </a:r>
+              <a:t>Three choices that make this a careful fairness analysis, not just a model</a:t>
+            </a:r>
+          </a:p>
+          <a:p>
             <a:r>
               <a:rPr lang="en-GB" dirty="0"/>
               <a:t> </a:t>
             </a:r>
             <a:r>
-              <a:rPr lang="en-GB" dirty="0" err="1"/>
-              <a:t>is</a:t>
+              <a:rPr lang="en-GB" b="1" dirty="0"/>
+              <a:t>No leakage</a:t>
             </a:r>
             <a:r>
               <a:rPr lang="en-GB" dirty="0"/>
-              <a:t> exactly what the rest of this talk unpacks.</a:t>
-            </a:r>
-          </a:p>
-          <a:p>
-            <a:pPr rtl="0"/>
+              <a:t> → prepped everything on training data only → so results are real, not the model peeking at test patients </a:t>
+            </a:r>
+          </a:p>
+          <a:p>
             <a:r>
               <a:rPr lang="en-GB" b="1" dirty="0"/>
-              <a:t>[Optional bridge to next slide]</a:t>
-            </a:r>
-            <a:endParaRPr lang="en-GB" dirty="0"/>
-          </a:p>
-          <a:p>
-            <a:pPr rtl="0"/>
+              <a:t>Split protects the smallest group</a:t>
+            </a:r>
             <a:r>
               <a:rPr lang="en-GB" dirty="0"/>
-              <a:t>And the clearest example of that is who the model was quietly getting wrong.</a:t>
-            </a:r>
-          </a:p>
-          <a:p>
-            <a:endParaRPr lang="en-GB" dirty="0"/>
-          </a:p>
-          <a:p>
-            <a:endParaRPr lang="en-GB" dirty="0"/>
-          </a:p>
-          <a:p>
-            <a:endParaRPr lang="en-GB" dirty="0"/>
+              <a:t> → women are a minority → a random split could've left too few to judge → I balanced it so fairness wasn't left to chance </a:t>
+            </a:r>
           </a:p>
           <a:p>
             <a:r>
               <a:rPr lang="en-GB" b="1" dirty="0"/>
-              <a:t>Area Under the Receiver Operating Characteristic Curve</a:t>
+              <a:t>Kept sex and age in on purpose</a:t>
             </a:r>
             <a:r>
               <a:rPr lang="en-GB" dirty="0"/>
-              <a:t>,</a:t>
+              <a:t> → this is the counterintuitive one → removing them doesn't help, the model just relearns bias invisibly → keeping them means I can </a:t>
+            </a:r>
+            <a:r>
+              <a:rPr lang="en-GB" i="1" dirty="0"/>
+              <a:t>see</a:t>
+            </a:r>
+            <a:r>
+              <a:rPr lang="en-GB" dirty="0"/>
+              <a:t> it and measure it</a:t>
             </a:r>
           </a:p>
         </p:txBody>
@@ -1996,7 +1719,7 @@
           <a:p>
             <a:fld id="{50DC7DE9-ACFA-4D31-A3BC-33B1D466B041}" type="slidenum">
               <a:rPr lang="en-GB" smtClean="0"/>
-              <a:t>9</a:t>
+              <a:t>8</a:t>
             </a:fld>
             <a:endParaRPr lang="en-GB"/>
           </a:p>
@@ -2005,7 +1728,7 @@
     </p:spTree>
     <p:extLst>
       <p:ext uri="{BB962C8B-B14F-4D97-AF65-F5344CB8AC3E}">
-        <p14:creationId xmlns:p14="http://schemas.microsoft.com/office/powerpoint/2010/main" val="1564895498"/>
+        <p14:creationId xmlns:p14="http://schemas.microsoft.com/office/powerpoint/2010/main" val="1319403379"/>
       </p:ext>
     </p:extLst>
   </p:cSld>
@@ -2059,123 +1782,76 @@
           <a:bodyPr/>
           <a:lstStyle/>
           <a:p>
-            <a:pPr rtl="0"/>
             <a:r>
               <a:rPr lang="en-GB" b="1" dirty="0"/>
-              <a:t>Name the finding plainly — this is the payoff of the "3 of 6" reveal]</a:t>
-            </a:r>
-            <a:endParaRPr lang="en-GB" dirty="0"/>
-          </a:p>
-          <a:p>
-            <a:pPr rtl="0"/>
+              <a:t>AUC</a:t>
+            </a:r>
             <a:r>
               <a:rPr lang="en-GB" dirty="0"/>
-              <a:t>This is the clearest example of what "fails bias suppression" actually means for patients. These bars show recall by sex — that's the percentage of people who genuinely had heart disease that the model correctly caught.</a:t>
-            </a:r>
-          </a:p>
-          <a:p>
-            <a:pPr rtl="0"/>
+              <a:t> = </a:t>
+            </a:r>
             <a:r>
               <a:rPr lang="en-GB" b="1" dirty="0"/>
-              <a:t>[Walk the two bars]</a:t>
-            </a:r>
-            <a:endParaRPr lang="en-GB" dirty="0"/>
-          </a:p>
-          <a:p>
-            <a:pPr rtl="0"/>
+              <a:t>Area Under the Curve</a:t>
+            </a:r>
             <a:r>
               <a:rPr lang="en-GB" dirty="0"/>
-              <a:t>For men, it caught 93.5%. For women, only 70%. Same model, same disease — but if you were a woman with heart disease, the model was far more likely to miss you.</a:t>
-            </a:r>
-          </a:p>
-          <a:p>
-            <a:pPr rtl="0"/>
+              <a:t> </a:t>
+            </a:r>
             <a:r>
               <a:rPr lang="en-GB" b="1" dirty="0"/>
-              <a:t>[The confidence intervals — say this in plain words, it's your rigour move]</a:t>
-            </a:r>
-            <a:br>
+              <a:t>ROC</a:t>
+            </a:r>
+            <a:r>
               <a:rPr lang="en-GB" dirty="0"/>
-            </a:br>
-            <a:br>
+              <a:t> = </a:t>
+            </a:r>
+            <a:r>
+              <a:rPr lang="en-GB" b="1" dirty="0"/>
+              <a:t>Receiver Operating Characteristic</a:t>
+            </a:r>
+          </a:p>
+          <a:p>
+            <a:r>
               <a:rPr lang="en-GB" dirty="0"/>
-            </a:br>
+              <a:t>On accuracy → excellent. 0.957, way above the 0.80 bar</a:t>
+            </a:r>
+          </a:p>
+          <a:p>
             <a:r>
               <a:rPr lang="en-GB" dirty="0"/>
-              <a:t>Now, the bars are the best estimate, and the lines through them show how </a:t>
+              <a:t> Judged the usual way, you'd deploy it </a:t>
             </a:r>
             <a:r>
               <a:rPr lang="en-GB" i="1" dirty="0"/>
-              <a:t>certain</a:t>
+              <a:t>(pause)</a:t>
             </a:r>
             <a:r>
               <a:rPr lang="en-GB" dirty="0"/>
-              <a:t> we can be. And here's the honest part: the female estimate is based on a small number of patients — only twenty women in the test set actually had the disease. So its range is wide: the true rate could be anywhere from about 48% to 85%. The male estimate, built on far more patients, is much tighter.</a:t>
-            </a:r>
-          </a:p>
-          <a:p>
-            <a:pPr rtl="0"/>
-            <a:r>
-              <a:rPr lang="en-GB" b="1" dirty="0"/>
-              <a:t>[Turn the limitation into an argument — don't apologise, reframe]</a:t>
-            </a:r>
-            <a:endParaRPr lang="en-GB" dirty="0"/>
-          </a:p>
-          <a:p>
-            <a:pPr rtl="0"/>
+              <a:t> </a:t>
+            </a:r>
+          </a:p>
+          <a:p>
             <a:r>
               <a:rPr lang="en-GB" dirty="0"/>
-              <a:t>I want to be upfront about that uncertainty rather than hide it. But notice </a:t>
-            </a:r>
+              <a:t>But accuracy is only 1 of 6 criteria Score all six → passes 3, fails 3 </a:t>
+            </a:r>
+          </a:p>
+          <a:p>
             <a:r>
               <a:rPr lang="en-GB" i="1" dirty="0"/>
-              <a:t>why</a:t>
+              <a:t>(point at the dots)</a:t>
             </a:r>
             <a:r>
               <a:rPr lang="en-GB" dirty="0"/>
-              <a:t> the female range is so wide — it's wide because there were so few women to measure from in the first place. And that's not just a limitation of my analysis. It's a clue to the underlying problem.</a:t>
-            </a:r>
-          </a:p>
-          <a:p>
-            <a:pPr rtl="0"/>
-            <a:r>
-              <a:rPr lang="en-GB" b="1" dirty="0"/>
-              <a:t>[The formal proof — point to the metrics box]</a:t>
-            </a:r>
-            <a:endParaRPr lang="en-GB" dirty="0"/>
-          </a:p>
-          <a:p>
-            <a:pPr rtl="0"/>
+              <a:t> Green: accuracy, consistency, ethicality. Red: bias suppression, representativeness, correctability </a:t>
+            </a:r>
+          </a:p>
+          <a:p>
             <a:r>
               <a:rPr lang="en-GB" dirty="0"/>
-              <a:t>And this isn't only visible in the bars. The formal fairness measures confirm it: the gaps on both equalised odds and demographic parity are well beyond the acceptable threshold. So both the intuitive picture and the formal metrics point the same way.</a:t>
-            </a:r>
-          </a:p>
-          <a:p>
-            <a:pPr rtl="0"/>
-            <a:r>
-              <a:rPr lang="en-GB" b="1" dirty="0"/>
-              <a:t>[Hand off to representativeness]</a:t>
-            </a:r>
-            <a:endParaRPr lang="en-GB" dirty="0"/>
-          </a:p>
-          <a:p>
-            <a:pPr rtl="0"/>
-            <a:r>
-              <a:rPr lang="en-GB" dirty="0"/>
-              <a:t>So the natural question is </a:t>
-            </a:r>
-            <a:r>
-              <a:rPr lang="en-GB" i="1" dirty="0"/>
-              <a:t>why</a:t>
-            </a:r>
-            <a:r>
-              <a:rPr lang="en-GB" dirty="0"/>
-              <a:t> — why is the model so much worse at women? And the answer starts with who was in the data to begin with.</a:t>
-            </a:r>
-          </a:p>
-          <a:p>
-            <a:endParaRPr lang="en-GB" dirty="0"/>
+              <a:t>Looks ready — but half the fairness criteria fail. That gap is the whole talk</a:t>
+            </a:r>
           </a:p>
         </p:txBody>
       </p:sp>
@@ -2196,7 +1872,7 @@
           <a:p>
             <a:fld id="{50DC7DE9-ACFA-4D31-A3BC-33B1D466B041}" type="slidenum">
               <a:rPr lang="en-GB" smtClean="0"/>
-              <a:t>10</a:t>
+              <a:t>9</a:t>
             </a:fld>
             <a:endParaRPr lang="en-GB"/>
           </a:p>
@@ -2205,7 +1881,7 @@
     </p:spTree>
     <p:extLst>
       <p:ext uri="{BB962C8B-B14F-4D97-AF65-F5344CB8AC3E}">
-        <p14:creationId xmlns:p14="http://schemas.microsoft.com/office/powerpoint/2010/main" val="1988090156"/>
+        <p14:creationId xmlns:p14="http://schemas.microsoft.com/office/powerpoint/2010/main" val="1564895498"/>
       </p:ext>
     </p:extLst>
   </p:cSld>
@@ -2259,159 +1935,29 @@
           <a:bodyPr/>
           <a:lstStyle/>
           <a:p>
-            <a:pPr rtl="0"/>
-            <a:r>
-              <a:rPr lang="en-GB" b="1" dirty="0"/>
-              <a:t>Pick up directly from the recall slide's "why?"]</a:t>
-            </a:r>
-            <a:endParaRPr lang="en-GB" dirty="0"/>
-          </a:p>
-          <a:p>
-            <a:pPr rtl="0"/>
             <a:r>
               <a:rPr lang="en-GB" dirty="0"/>
-              <a:t>So why was the model so much worse at detecting heart disease in women? A big part of the answer is who was in the training data.</a:t>
-            </a:r>
-          </a:p>
-          <a:p>
-            <a:pPr rtl="0"/>
-            <a:r>
-              <a:rPr lang="en-GB" b="1" dirty="0"/>
-              <a:t>[Representation — the two bars]</a:t>
-            </a:r>
-            <a:endParaRPr lang="en-GB" dirty="0"/>
-          </a:p>
-          <a:p>
-            <a:pPr rtl="0"/>
+              <a:t>Recall by sex → % of real heart-disease cases the model caught</a:t>
+            </a:r>
+          </a:p>
+          <a:p>
             <a:r>
               <a:rPr lang="en-GB" dirty="0"/>
-              <a:t>Women made up only 21% of this dataset. But in the real world, women account for around a third of heart disease cases. So women are under-represented relative to how common the disease actually is in women — giving a representation ratio of 0.64, well below the 0.80 bar.</a:t>
-            </a:r>
-          </a:p>
-          <a:p>
-            <a:pPr rtl="0"/>
-            <a:r>
-              <a:rPr lang="en-GB" b="1" dirty="0"/>
-              <a:t>[Pre-empt the "but men get it more" objection]</a:t>
-            </a:r>
-            <a:endParaRPr lang="en-GB" dirty="0"/>
-          </a:p>
-          <a:p>
-            <a:pPr rtl="0"/>
+              <a:t> </a:t>
+            </a:r>
+          </a:p>
+          <a:p>
             <a:r>
               <a:rPr lang="en-GB" dirty="0"/>
-              <a:t>Now, this dataset being majority-male isn't itself the problem — men do have higher rates of heart disease, so some imbalance is expected. The problem is that even accounting for that, women are still under-represented relative to their own real-world disease rate. The model simply had fewer women to learn from — which is a large part of why it performs worse for them.</a:t>
-            </a:r>
-          </a:p>
-          <a:p>
-            <a:pPr rtl="0"/>
-            <a:r>
-              <a:rPr lang="en-GB" b="1" dirty="0"/>
-              <a:t>[The key limitation — say it plainly]</a:t>
-            </a:r>
-            <a:endParaRPr lang="en-GB" dirty="0"/>
-          </a:p>
-          <a:p>
-            <a:pPr rtl="0"/>
+              <a:t>With only 10 women in the test set, that 70% rests on 7 of 10 cases, so the true rate could be anywhere from 40 to 89% — I report that range to be honest about the uncertainty."</a:t>
+            </a:r>
+            <a:endParaRPr lang="en-GB" i="1" dirty="0"/>
+          </a:p>
+          <a:p>
             <a:r>
               <a:rPr lang="en-GB" dirty="0"/>
-              <a:t>And this is the one gap that mitigation can't fix. You can adjust an algorithm, but you can't algorithmically manufacture patients who aren't in the data. Fixing representativeness means collecting better data — it's a problem that sits upstream of the model.</a:t>
-            </a:r>
-          </a:p>
-          <a:p>
-            <a:pPr rtl="0"/>
-            <a:r>
-              <a:rPr lang="en-GB" b="1" dirty="0"/>
-              <a:t>[Transition to correctability — signal it's a different kind of gap]</a:t>
-            </a:r>
-            <a:endParaRPr lang="en-GB" dirty="0"/>
-          </a:p>
-          <a:p>
-            <a:pPr rtl="0"/>
-            <a:r>
-              <a:rPr lang="en-GB" dirty="0"/>
-              <a:t>The second gap is a completely different kind of problem — not about the data, but about oversight.</a:t>
-            </a:r>
-          </a:p>
-          <a:p>
-            <a:pPr rtl="0"/>
-            <a:r>
-              <a:rPr lang="en-GB" b="1" dirty="0"/>
-              <a:t>[Correctability — the checklist]</a:t>
-            </a:r>
-            <a:endParaRPr lang="en-GB" dirty="0"/>
-          </a:p>
-          <a:p>
-            <a:pPr rtl="0"/>
-            <a:r>
-              <a:rPr lang="en-GB" dirty="0"/>
-              <a:t>I assessed correctability against a seven-point checklist drawn from AI governance guidance. The model met three of the seven. And there's a clear pattern in which three it passed. The ones it </a:t>
-            </a:r>
-            <a:r>
-              <a:rPr lang="en-GB" i="1" dirty="0"/>
-              <a:t>met</a:t>
-            </a:r>
-            <a:r>
-              <a:rPr lang="en-GB" dirty="0"/>
-              <a:t> are all about transparency — the predictions are interpretable, they come with confidence scores, and the uncertainty is communicated. But the ones it </a:t>
-            </a:r>
-            <a:r>
-              <a:rPr lang="en-GB" i="1" dirty="0"/>
-              <a:t>failed</a:t>
-            </a:r>
-            <a:r>
-              <a:rPr lang="en-GB" dirty="0"/>
-              <a:t> are all about control — there's no way for a clinician to override a prediction, no route for a patient to challenge one, no audit trail, and no version history.</a:t>
-            </a:r>
-          </a:p>
-          <a:p>
-            <a:pPr rtl="0"/>
-            <a:r>
-              <a:rPr lang="en-GB" b="1" dirty="0"/>
-              <a:t>[The insight — land this clearly]</a:t>
-            </a:r>
-            <a:endParaRPr lang="en-GB" dirty="0"/>
-          </a:p>
-          <a:p>
-            <a:pPr rtl="0"/>
-            <a:r>
-              <a:rPr lang="en-GB" dirty="0"/>
-              <a:t>So the model could </a:t>
-            </a:r>
-            <a:r>
-              <a:rPr lang="en-GB" i="1" dirty="0"/>
-              <a:t>explain</a:t>
-            </a:r>
-            <a:r>
-              <a:rPr lang="en-GB" dirty="0"/>
-              <a:t> itself, but it couldn't be </a:t>
-            </a:r>
-            <a:r>
-              <a:rPr lang="en-GB" i="1" dirty="0"/>
-              <a:t>corrected</a:t>
-            </a:r>
-            <a:r>
-              <a:rPr lang="en-GB" dirty="0"/>
-              <a:t>. And correctability, in Leventhal's original framework, is exactly that — the ability to review and reverse a flawed decision. That's what's missing.</a:t>
-            </a:r>
-          </a:p>
-          <a:p>
-            <a:pPr rtl="0"/>
-            <a:r>
-              <a:rPr lang="en-GB" b="1" dirty="0"/>
-              <a:t>[Optional bridge, if correctability connects to your survey later]</a:t>
-            </a:r>
-            <a:endParaRPr lang="en-GB" dirty="0"/>
-          </a:p>
-          <a:p>
-            <a:pPr rtl="0"/>
-            <a:r>
-              <a:rPr lang="en-GB" dirty="0"/>
-              <a:t>And as we'll see, that missing oversight turns out to be the very thing the public cares about most.</a:t>
-            </a:r>
-          </a:p>
-          <a:p>
-            <a:endParaRPr lang="en-GB" dirty="0"/>
+              <a:t>Bottom box → formal metrics agree, both past the 0.10 line</a:t>
+            </a:r>
           </a:p>
         </p:txBody>
       </p:sp>
@@ -2432,7 +1978,7 @@
           <a:p>
             <a:fld id="{50DC7DE9-ACFA-4D31-A3BC-33B1D466B041}" type="slidenum">
               <a:rPr lang="en-GB" smtClean="0"/>
-              <a:t>11</a:t>
+              <a:t>10</a:t>
             </a:fld>
             <a:endParaRPr lang="en-GB"/>
           </a:p>
@@ -2441,7 +1987,7 @@
     </p:spTree>
     <p:extLst>
       <p:ext uri="{BB962C8B-B14F-4D97-AF65-F5344CB8AC3E}">
-        <p14:creationId xmlns:p14="http://schemas.microsoft.com/office/powerpoint/2010/main" val="1215555519"/>
+        <p14:creationId xmlns:p14="http://schemas.microsoft.com/office/powerpoint/2010/main" val="1988090156"/>
       </p:ext>
     </p:extLst>
   </p:cSld>
@@ -2495,109 +2041,6 @@
           <a:bodyPr/>
           <a:lstStyle/>
           <a:p>
-            <a:pPr rtl="0"/>
-            <a:r>
-              <a:rPr lang="en-GB" dirty="0" err="1"/>
-              <a:t>aving</a:t>
-            </a:r>
-            <a:r>
-              <a:rPr lang="en-GB" dirty="0"/>
-              <a:t> identified the failures, I applied two targeted interventions. And I want to be clear about scope from the start: there are two interventions for three failures. Representativeness has no intervention here — deliberately — because it's a data-collection problem, not an algorithmic one. No reweighting or constraint creates female patients who aren't in the dataset. That gap sits upstream of the model, so I'll return to it as a limitation rather than something I claim to fix.</a:t>
-            </a:r>
-          </a:p>
-          <a:p>
-            <a:pPr rtl="0"/>
-            <a:r>
-              <a:rPr lang="en-GB" b="1" dirty="0"/>
-              <a:t>[Intervention 1 — bias suppression, technical detail intact]</a:t>
-            </a:r>
-            <a:endParaRPr lang="en-GB" dirty="0"/>
-          </a:p>
-          <a:p>
-            <a:pPr rtl="0"/>
-            <a:r>
-              <a:rPr lang="en-GB" dirty="0"/>
-              <a:t>The first intervention targets bias suppression. I used </a:t>
-            </a:r>
-            <a:r>
-              <a:rPr lang="en-GB" dirty="0" err="1"/>
-              <a:t>Fairlearn's</a:t>
-            </a:r>
-            <a:r>
-              <a:rPr lang="en-GB" dirty="0"/>
-              <a:t> </a:t>
-            </a:r>
-            <a:r>
-              <a:rPr lang="en-GB" dirty="0" err="1"/>
-              <a:t>ExponentiatedGradient</a:t>
-            </a:r>
-            <a:r>
-              <a:rPr lang="en-GB" dirty="0"/>
-              <a:t>, constrained by equalised odds with a tolerance of 0.01. In effect it reweights the training distribution to bring the model's error rates — false positive and false negative rates — closer together across male and female patients. Critically, the base estimator inside the reduction is the </a:t>
-            </a:r>
-            <a:r>
-              <a:rPr lang="en-GB" i="1" dirty="0"/>
-              <a:t>identical</a:t>
-            </a:r>
-            <a:r>
-              <a:rPr lang="en-GB" dirty="0"/>
-              <a:t> pipeline I used for the baseline — same imputation, same scaling, same logistic regression — so the before-and-after comparison is like-for-like. Any change in fairness is attributable to the constraint, not to a different underlying model.</a:t>
-            </a:r>
-          </a:p>
-          <a:p>
-            <a:pPr rtl="0"/>
-            <a:r>
-              <a:rPr lang="en-GB" b="1" dirty="0"/>
-              <a:t>[Intervention 2 — correctability, with the honest bound]</a:t>
-            </a:r>
-            <a:endParaRPr lang="en-GB" dirty="0"/>
-          </a:p>
-          <a:p>
-            <a:pPr rtl="0"/>
-            <a:r>
-              <a:rPr lang="en-GB" dirty="0"/>
-              <a:t>The second targets correctability. Predictions where the model's confidence falls in the uncertain band — between 30% and 70% — are automatically flagged for clinician review. This inserts human oversight precisely where the model is least reliable.</a:t>
-            </a:r>
-          </a:p>
-          <a:p>
-            <a:pPr rtl="0"/>
-            <a:r>
-              <a:rPr lang="en-GB" b="1" dirty="0"/>
-              <a:t>[The precision point — say this deliberately, it's the rigour move]</a:t>
-            </a:r>
-            <a:endParaRPr lang="en-GB" dirty="0"/>
-          </a:p>
-          <a:p>
-            <a:pPr rtl="0"/>
-            <a:r>
-              <a:rPr lang="en-GB" dirty="0"/>
-              <a:t>But I want to be exact about what this does and doesn't achieve. Flagging surfaces uncertain cases for review — it's the </a:t>
-            </a:r>
-            <a:r>
-              <a:rPr lang="en-GB" i="1" dirty="0"/>
-              <a:t>review</a:t>
-            </a:r>
-            <a:r>
-              <a:rPr lang="en-GB" dirty="0"/>
-              <a:t> half of correctability. It is not yet a full override-and-audit mechanism: a clinician is prompted to look, but the infrastructure to formally overturn, log, and version a decision isn't there. That's why, as you'll see, correctability moves to partial, not pass. Flagging is a genuine first step, not a complete solution.</a:t>
-            </a:r>
-          </a:p>
-          <a:p>
-            <a:pPr rtl="0"/>
-            <a:r>
-              <a:rPr lang="en-GB" b="1" dirty="0"/>
-              <a:t>[Bridge to results]</a:t>
-            </a:r>
-            <a:endParaRPr lang="en-GB" dirty="0"/>
-          </a:p>
-          <a:p>
-            <a:pPr rtl="0"/>
-            <a:r>
-              <a:rPr lang="en-GB" dirty="0"/>
-              <a:t>So: one intervention on bias suppression, one partial step on correctability, and representativeness left explicitly untouched. Let's see how far that actually moved the numbers.</a:t>
-            </a:r>
-          </a:p>
-          <a:p>
             <a:endParaRPr lang="en-GB" dirty="0"/>
           </a:p>
         </p:txBody>
@@ -2619,7 +2062,7 @@
           <a:p>
             <a:fld id="{50DC7DE9-ACFA-4D31-A3BC-33B1D466B041}" type="slidenum">
               <a:rPr lang="en-GB" smtClean="0"/>
-              <a:t>12</a:t>
+              <a:t>11</a:t>
             </a:fld>
             <a:endParaRPr lang="en-GB"/>
           </a:p>
@@ -2628,7 +2071,7 @@
     </p:spTree>
     <p:extLst>
       <p:ext uri="{BB962C8B-B14F-4D97-AF65-F5344CB8AC3E}">
-        <p14:creationId xmlns:p14="http://schemas.microsoft.com/office/powerpoint/2010/main" val="1362283869"/>
+        <p14:creationId xmlns:p14="http://schemas.microsoft.com/office/powerpoint/2010/main" val="1215555519"/>
       </p:ext>
     </p:extLst>
   </p:cSld>
@@ -5748,7 +5191,7 @@
         <p:spPr>
           <a:xfrm>
             <a:off x="822960" y="1874519"/>
-            <a:ext cx="9144000" cy="365760"/>
+            <a:ext cx="9144000" cy="215444"/>
           </a:xfrm>
           <a:prstGeom prst="rect">
             <a:avLst/>
@@ -5767,13 +5210,13 @@
               </a:lnSpc>
             </a:pPr>
             <a:r>
-              <a:rPr sz="1400" b="1" i="0">
+              <a:rPr sz="1400" b="1" i="0" dirty="0">
                 <a:solidFill>
                   <a:srgbClr val="C9748F"/>
                 </a:solidFill>
                 <a:latin typeface="Calibri"/>
               </a:rPr>
-              <a:t>MSC DISSERTATION DEFENSE</a:t>
+              <a:t>MSC DISSERTATION </a:t>
             </a:r>
           </a:p>
         </p:txBody>
@@ -5842,7 +5285,7 @@
         <p:spPr>
           <a:xfrm>
             <a:off x="822960" y="3977639"/>
-            <a:ext cx="10058400" cy="640080"/>
+            <a:ext cx="10058400" cy="307777"/>
           </a:xfrm>
           <a:prstGeom prst="rect">
             <a:avLst/>
@@ -5855,20 +5298,24 @@
           </a:bodyPr>
           <a:lstStyle/>
           <a:p>
-            <a:pPr algn="l">
-              <a:lnSpc>
-                <a:spcPct val="100000"/>
-              </a:lnSpc>
-            </a:pPr>
-            <a:r>
-              <a:rPr sz="1900" b="0" i="1">
-                <a:solidFill>
-                  <a:srgbClr val="666666"/>
-                </a:solidFill>
-                <a:latin typeface="Calibri"/>
-              </a:rPr>
-              <a:t>Evaluating and Mitigating Bias in a Heart Disease Prediction Model</a:t>
-            </a:r>
+            <a:r>
+              <a:rPr lang="en-GB" sz="2000" i="1" dirty="0">
+                <a:solidFill>
+                  <a:schemeClr val="tx1">
+                    <a:lumMod val="65000"/>
+                    <a:lumOff val="35000"/>
+                  </a:schemeClr>
+                </a:solidFill>
+                <a:latin typeface="+mj-lt"/>
+              </a:rPr>
+              <a:t>A six-criterion fairness framework, tested on a heart disease prediction model</a:t>
+            </a:r>
+            <a:endParaRPr sz="1900" b="0" i="1" dirty="0">
+              <a:solidFill>
+                <a:srgbClr val="666666"/>
+              </a:solidFill>
+              <a:latin typeface="Calibri"/>
+            </a:endParaRPr>
           </a:p>
         </p:txBody>
       </p:sp>
@@ -6144,7 +5591,7 @@
         <p:spPr>
           <a:xfrm>
             <a:off x="685800" y="5074920"/>
-            <a:ext cx="10789920" cy="365760"/>
+            <a:ext cx="10789920" cy="192360"/>
           </a:xfrm>
           <a:prstGeom prst="rect">
             <a:avLst/>
@@ -6163,13 +5610,31 @@
               </a:lnSpc>
             </a:pPr>
             <a:r>
-              <a:rPr sz="1250" b="0" i="1">
+              <a:rPr sz="1250" b="0" i="1" dirty="0">
                 <a:solidFill>
                   <a:srgbClr val="666666"/>
                 </a:solidFill>
                 <a:latin typeface="Calibri"/>
               </a:rPr>
-              <a:t>Recall by sex, heart-disease-present class — the percentage of actual cases the model correctly identified.</a:t>
+              <a:t>Recall by sex, heart-disease-present class</a:t>
+            </a:r>
+            <a:r>
+              <a:rPr lang="en-GB" sz="1250" b="0" i="1" dirty="0">
+                <a:solidFill>
+                  <a:srgbClr val="666666"/>
+                </a:solidFill>
+                <a:latin typeface="Calibri"/>
+              </a:rPr>
+              <a:t>:</a:t>
+            </a:r>
+            <a:r>
+              <a:rPr sz="1250" b="0" i="1" dirty="0">
+                <a:solidFill>
+                  <a:srgbClr val="666666"/>
+                </a:solidFill>
+                <a:latin typeface="Calibri"/>
+              </a:rPr>
+              <a:t> percentage of actual cases the model correctly identified.</a:t>
             </a:r>
           </a:p>
         </p:txBody>
@@ -6308,7 +5773,7 @@
         <p:spPr>
           <a:xfrm>
             <a:off x="11521440" y="6510528"/>
-            <a:ext cx="457200" cy="274320"/>
+            <a:ext cx="457200" cy="146194"/>
           </a:xfrm>
           <a:prstGeom prst="rect">
             <a:avLst/>
@@ -6327,14 +5792,20 @@
               </a:lnSpc>
             </a:pPr>
             <a:r>
-              <a:rPr sz="950" b="0" i="0">
+              <a:rPr lang="en-GB" sz="950" dirty="0">
                 <a:solidFill>
                   <a:srgbClr val="999999"/>
                 </a:solidFill>
                 <a:latin typeface="Calibri"/>
               </a:rPr>
-              <a:t>6</a:t>
-            </a:r>
+              <a:t>9</a:t>
+            </a:r>
+            <a:endParaRPr sz="950" b="0" i="0" dirty="0">
+              <a:solidFill>
+                <a:srgbClr val="999999"/>
+              </a:solidFill>
+              <a:latin typeface="Calibri"/>
+            </a:endParaRPr>
           </a:p>
         </p:txBody>
       </p:sp>
@@ -6372,10 +5843,10 @@
       </p:sp>
       <p:pic>
         <p:nvPicPr>
-          <p:cNvPr id="19" name="Picture 18">
+          <p:cNvPr id="12" name="Picture 11">
             <a:extLst>
               <a:ext uri="{FF2B5EF4-FFF2-40B4-BE49-F238E27FC236}">
-                <a16:creationId xmlns:a16="http://schemas.microsoft.com/office/drawing/2014/main" id="{1472DF24-4992-6CB6-E621-14104C8B28B7}"/>
+                <a16:creationId xmlns:a16="http://schemas.microsoft.com/office/drawing/2014/main" id="{7CC99BDF-9AFD-1841-C645-B08AA3B2D496}"/>
               </a:ext>
             </a:extLst>
           </p:cNvPr>
@@ -6392,8 +5863,8 @@
         </p:blipFill>
         <p:spPr>
           <a:xfrm>
-            <a:off x="2476072" y="1333025"/>
-            <a:ext cx="6318607" cy="3650455"/>
+            <a:off x="3132087" y="1328275"/>
+            <a:ext cx="5897345" cy="3406470"/>
           </a:xfrm>
           <a:prstGeom prst="rect">
             <a:avLst/>
@@ -6583,7 +6054,7 @@
         <p:spPr>
           <a:xfrm>
             <a:off x="11521440" y="6510528"/>
-            <a:ext cx="457200" cy="274320"/>
+            <a:ext cx="457200" cy="146194"/>
           </a:xfrm>
           <a:prstGeom prst="rect">
             <a:avLst/>
@@ -6602,14 +6073,20 @@
               </a:lnSpc>
             </a:pPr>
             <a:r>
-              <a:rPr sz="950" b="0" i="0">
+              <a:rPr lang="en-GB" sz="950" dirty="0">
                 <a:solidFill>
                   <a:srgbClr val="999999"/>
                 </a:solidFill>
                 <a:latin typeface="Calibri"/>
               </a:rPr>
-              <a:t>7</a:t>
-            </a:r>
+              <a:t>10</a:t>
+            </a:r>
+            <a:endParaRPr sz="950" b="0" i="0" dirty="0">
+              <a:solidFill>
+                <a:srgbClr val="999999"/>
+              </a:solidFill>
+              <a:latin typeface="Calibri"/>
+            </a:endParaRPr>
           </a:p>
         </p:txBody>
       </p:sp>
@@ -7061,78 +6538,6 @@
           </a:p>
         </p:txBody>
       </p:sp>
-      <p:pic>
-        <p:nvPicPr>
-          <p:cNvPr id="13" name="Graphic 12" descr="Checkbox Checked with solid fill">
-            <a:extLst>
-              <a:ext uri="{FF2B5EF4-FFF2-40B4-BE49-F238E27FC236}">
-                <a16:creationId xmlns:a16="http://schemas.microsoft.com/office/drawing/2014/main" id="{6B7DC9CC-3A74-E456-042B-7D018733F87A}"/>
-              </a:ext>
-            </a:extLst>
-          </p:cNvPr>
-          <p:cNvPicPr>
-            <a:picLocks noChangeAspect="1"/>
-          </p:cNvPicPr>
-          <p:nvPr/>
-        </p:nvPicPr>
-        <p:blipFill>
-          <a:blip>
-            <a:extLst>
-              <a:ext uri="{96DAC541-7B7A-43D3-8B79-37D633B846F1}">
-                <asvg:svgBlip xmlns:asvg="http://schemas.microsoft.com/office/drawing/2016/SVG/main" r:embed="rId4"/>
-              </a:ext>
-            </a:extLst>
-          </a:blip>
-          <a:stretch>
-            <a:fillRect/>
-          </a:stretch>
-        </p:blipFill>
-        <p:spPr>
-          <a:xfrm>
-            <a:off x="5638800" y="2971800"/>
-            <a:ext cx="914400" cy="914400"/>
-          </a:xfrm>
-          <a:prstGeom prst="rect">
-            <a:avLst/>
-          </a:prstGeom>
-        </p:spPr>
-      </p:pic>
-      <p:pic>
-        <p:nvPicPr>
-          <p:cNvPr id="18" name="Graphic 17" descr="Badge Cross with solid fill">
-            <a:extLst>
-              <a:ext uri="{FF2B5EF4-FFF2-40B4-BE49-F238E27FC236}">
-                <a16:creationId xmlns:a16="http://schemas.microsoft.com/office/drawing/2014/main" id="{BFE6523E-C4F0-FB95-F515-CAAE5809FF11}"/>
-              </a:ext>
-            </a:extLst>
-          </p:cNvPr>
-          <p:cNvPicPr>
-            <a:picLocks noChangeAspect="1"/>
-          </p:cNvPicPr>
-          <p:nvPr/>
-        </p:nvPicPr>
-        <p:blipFill>
-          <a:blip>
-            <a:extLst>
-              <a:ext uri="{96DAC541-7B7A-43D3-8B79-37D633B846F1}">
-                <asvg:svgBlip xmlns:asvg="http://schemas.microsoft.com/office/drawing/2016/SVG/main" r:embed="rId5"/>
-              </a:ext>
-            </a:extLst>
-          </a:blip>
-          <a:stretch>
-            <a:fillRect/>
-          </a:stretch>
-        </p:blipFill>
-        <p:spPr>
-          <a:xfrm>
-            <a:off x="5360013" y="3895278"/>
-            <a:ext cx="914400" cy="914400"/>
-          </a:xfrm>
-          <a:prstGeom prst="rect">
-            <a:avLst/>
-          </a:prstGeom>
-        </p:spPr>
-      </p:pic>
     </p:spTree>
   </p:cSld>
   <p:clrMapOvr>
@@ -8279,7 +7684,7 @@
         <p:spPr>
           <a:xfrm>
             <a:off x="11521440" y="6510528"/>
-            <a:ext cx="457200" cy="274320"/>
+            <a:ext cx="457200" cy="146194"/>
           </a:xfrm>
           <a:prstGeom prst="rect">
             <a:avLst/>
@@ -8298,14 +7703,20 @@
               </a:lnSpc>
             </a:pPr>
             <a:r>
-              <a:rPr sz="950" b="0" i="0">
+              <a:rPr lang="en-GB" sz="950" dirty="0">
                 <a:solidFill>
                   <a:srgbClr val="999999"/>
                 </a:solidFill>
                 <a:latin typeface="Calibri"/>
               </a:rPr>
-              <a:t>9</a:t>
-            </a:r>
+              <a:t>11</a:t>
+            </a:r>
+            <a:endParaRPr sz="950" b="0" i="0" dirty="0">
+              <a:solidFill>
+                <a:srgbClr val="999999"/>
+              </a:solidFill>
+              <a:latin typeface="Calibri"/>
+            </a:endParaRPr>
           </a:p>
         </p:txBody>
       </p:sp>
@@ -8514,7 +7925,7 @@
             </a:pPr>
             <a:r>
               <a:rPr lang="en-GB" sz="1400" dirty="0"/>
-              <a:t>The visible gap almost closed: female recall rose from 70% to 90%, with no loss for men. But both formal fairness measures improved without clearing the 0.10 limit, so bias suppression reached partial, not a full pass. Overall accuracy barely moved: 0.957 to 0.895</a:t>
+              <a:t>The visible gap almost closed: female recall rose from 70% to 80%, with no loss for men. But both formal fairness measures improved without clearing the 0.10 limit, so bias suppression reached partial, not a full pass. Overall accuracy barely moved: 0.957 to 0.895</a:t>
             </a:r>
             <a:endParaRPr sz="1250" b="0" i="0" dirty="0">
               <a:solidFill>
@@ -8573,7 +7984,7 @@
         <p:spPr>
           <a:xfrm>
             <a:off x="11521440" y="6510528"/>
-            <a:ext cx="457200" cy="274320"/>
+            <a:ext cx="457200" cy="146194"/>
           </a:xfrm>
           <a:prstGeom prst="rect">
             <a:avLst/>
@@ -8592,23 +8003,29 @@
               </a:lnSpc>
             </a:pPr>
             <a:r>
-              <a:rPr sz="950" b="0" i="0">
+              <a:rPr lang="en-GB" sz="950" dirty="0">
                 <a:solidFill>
                   <a:srgbClr val="999999"/>
                 </a:solidFill>
                 <a:latin typeface="Calibri"/>
               </a:rPr>
-              <a:t>10</a:t>
-            </a:r>
+              <a:t>12</a:t>
+            </a:r>
+            <a:endParaRPr sz="950" b="0" i="0" dirty="0">
+              <a:solidFill>
+                <a:srgbClr val="999999"/>
+              </a:solidFill>
+              <a:latin typeface="Calibri"/>
+            </a:endParaRPr>
           </a:p>
         </p:txBody>
       </p:sp>
       <p:pic>
         <p:nvPicPr>
-          <p:cNvPr id="14" name="Picture 13">
+          <p:cNvPr id="9" name="Picture 8">
             <a:extLst>
               <a:ext uri="{FF2B5EF4-FFF2-40B4-BE49-F238E27FC236}">
-                <a16:creationId xmlns:a16="http://schemas.microsoft.com/office/drawing/2014/main" id="{BD1043B8-16E6-B445-D78D-B9FC85DB0F00}"/>
+                <a16:creationId xmlns:a16="http://schemas.microsoft.com/office/drawing/2014/main" id="{AD7C0AE7-1758-1127-122E-6ECBAA4CC0C9}"/>
               </a:ext>
             </a:extLst>
           </p:cNvPr>
@@ -8625,8 +8042,8 @@
         </p:blipFill>
         <p:spPr>
           <a:xfrm>
-            <a:off x="2711296" y="1179310"/>
-            <a:ext cx="6738927" cy="4319825"/>
+            <a:off x="2961906" y="1481237"/>
+            <a:ext cx="6268187" cy="3960046"/>
           </a:xfrm>
           <a:prstGeom prst="rect">
             <a:avLst/>
@@ -9577,7 +8994,7 @@
         <p:spPr>
           <a:xfrm>
             <a:off x="11521440" y="6510528"/>
-            <a:ext cx="457200" cy="274320"/>
+            <a:ext cx="457200" cy="146194"/>
           </a:xfrm>
           <a:prstGeom prst="rect">
             <a:avLst/>
@@ -9596,14 +9013,29 @@
               </a:lnSpc>
             </a:pPr>
             <a:r>
-              <a:rPr sz="950" b="0" i="0">
+              <a:rPr sz="950" b="0" i="0" dirty="0">
                 <a:solidFill>
                   <a:srgbClr val="999999"/>
                 </a:solidFill>
                 <a:latin typeface="Calibri"/>
               </a:rPr>
-              <a:t>11</a:t>
-            </a:r>
+              <a:t>1</a:t>
+            </a:r>
+            <a:r>
+              <a:rPr lang="en-GB" sz="950" b="0" i="0" dirty="0">
+                <a:solidFill>
+                  <a:srgbClr val="999999"/>
+                </a:solidFill>
+                <a:latin typeface="Calibri"/>
+              </a:rPr>
+              <a:t>3</a:t>
+            </a:r>
+            <a:endParaRPr sz="950" b="0" i="0" dirty="0">
+              <a:solidFill>
+                <a:srgbClr val="999999"/>
+              </a:solidFill>
+              <a:latin typeface="Calibri"/>
+            </a:endParaRPr>
           </a:p>
         </p:txBody>
       </p:sp>
@@ -9736,6 +9168,608 @@
   <p:clrMapOvr>
     <a:masterClrMapping/>
   </p:clrMapOvr>
+  <p:timing>
+    <p:tnLst>
+      <p:par>
+        <p:cTn id="1" dur="indefinite" restart="never" nodeType="tmRoot">
+          <p:childTnLst>
+            <p:seq concurrent="1" nextAc="seek">
+              <p:cTn id="2" dur="indefinite" nodeType="mainSeq">
+                <p:childTnLst>
+                  <p:par>
+                    <p:cTn id="3" fill="hold">
+                      <p:stCondLst>
+                        <p:cond delay="indefinite"/>
+                      </p:stCondLst>
+                      <p:childTnLst>
+                        <p:par>
+                          <p:cTn id="4" fill="hold">
+                            <p:stCondLst>
+                              <p:cond delay="0"/>
+                            </p:stCondLst>
+                            <p:childTnLst>
+                              <p:par>
+                                <p:cTn id="5" presetID="2" presetClass="entr" presetSubtype="4" fill="hold" nodeType="clickEffect">
+                                  <p:stCondLst>
+                                    <p:cond delay="0"/>
+                                  </p:stCondLst>
+                                  <p:childTnLst>
+                                    <p:set>
+                                      <p:cBhvr>
+                                        <p:cTn id="6" dur="1" fill="hold">
+                                          <p:stCondLst>
+                                            <p:cond delay="0"/>
+                                          </p:stCondLst>
+                                        </p:cTn>
+                                        <p:tgtEl>
+                                          <p:spTgt spid="4"/>
+                                        </p:tgtEl>
+                                        <p:attrNameLst>
+                                          <p:attrName>style.visibility</p:attrName>
+                                        </p:attrNameLst>
+                                      </p:cBhvr>
+                                      <p:to>
+                                        <p:strVal val="visible"/>
+                                      </p:to>
+                                    </p:set>
+                                    <p:anim calcmode="lin" valueType="num">
+                                      <p:cBhvr additive="base">
+                                        <p:cTn id="7" dur="500" fill="hold"/>
+                                        <p:tgtEl>
+                                          <p:spTgt spid="4"/>
+                                        </p:tgtEl>
+                                        <p:attrNameLst>
+                                          <p:attrName>ppt_x</p:attrName>
+                                        </p:attrNameLst>
+                                      </p:cBhvr>
+                                      <p:tavLst>
+                                        <p:tav tm="0">
+                                          <p:val>
+                                            <p:strVal val="#ppt_x"/>
+                                          </p:val>
+                                        </p:tav>
+                                        <p:tav tm="100000">
+                                          <p:val>
+                                            <p:strVal val="#ppt_x"/>
+                                          </p:val>
+                                        </p:tav>
+                                      </p:tavLst>
+                                    </p:anim>
+                                    <p:anim calcmode="lin" valueType="num">
+                                      <p:cBhvr additive="base">
+                                        <p:cTn id="8" dur="500" fill="hold"/>
+                                        <p:tgtEl>
+                                          <p:spTgt spid="4"/>
+                                        </p:tgtEl>
+                                        <p:attrNameLst>
+                                          <p:attrName>ppt_y</p:attrName>
+                                        </p:attrNameLst>
+                                      </p:cBhvr>
+                                      <p:tavLst>
+                                        <p:tav tm="0">
+                                          <p:val>
+                                            <p:strVal val="1+#ppt_h/2"/>
+                                          </p:val>
+                                        </p:tav>
+                                        <p:tav tm="100000">
+                                          <p:val>
+                                            <p:strVal val="#ppt_y"/>
+                                          </p:val>
+                                        </p:tav>
+                                      </p:tavLst>
+                                    </p:anim>
+                                  </p:childTnLst>
+                                </p:cTn>
+                              </p:par>
+                              <p:par>
+                                <p:cTn id="9" presetID="2" presetClass="entr" presetSubtype="4" fill="hold" grpId="0" nodeType="withEffect">
+                                  <p:stCondLst>
+                                    <p:cond delay="0"/>
+                                  </p:stCondLst>
+                                  <p:childTnLst>
+                                    <p:set>
+                                      <p:cBhvr>
+                                        <p:cTn id="10" dur="1" fill="hold">
+                                          <p:stCondLst>
+                                            <p:cond delay="0"/>
+                                          </p:stCondLst>
+                                        </p:cTn>
+                                        <p:tgtEl>
+                                          <p:spTgt spid="30"/>
+                                        </p:tgtEl>
+                                        <p:attrNameLst>
+                                          <p:attrName>style.visibility</p:attrName>
+                                        </p:attrNameLst>
+                                      </p:cBhvr>
+                                      <p:to>
+                                        <p:strVal val="visible"/>
+                                      </p:to>
+                                    </p:set>
+                                    <p:anim calcmode="lin" valueType="num">
+                                      <p:cBhvr additive="base">
+                                        <p:cTn id="11" dur="500" fill="hold"/>
+                                        <p:tgtEl>
+                                          <p:spTgt spid="30"/>
+                                        </p:tgtEl>
+                                        <p:attrNameLst>
+                                          <p:attrName>ppt_x</p:attrName>
+                                        </p:attrNameLst>
+                                      </p:cBhvr>
+                                      <p:tavLst>
+                                        <p:tav tm="0">
+                                          <p:val>
+                                            <p:strVal val="#ppt_x"/>
+                                          </p:val>
+                                        </p:tav>
+                                        <p:tav tm="100000">
+                                          <p:val>
+                                            <p:strVal val="#ppt_x"/>
+                                          </p:val>
+                                        </p:tav>
+                                      </p:tavLst>
+                                    </p:anim>
+                                    <p:anim calcmode="lin" valueType="num">
+                                      <p:cBhvr additive="base">
+                                        <p:cTn id="12" dur="500" fill="hold"/>
+                                        <p:tgtEl>
+                                          <p:spTgt spid="30"/>
+                                        </p:tgtEl>
+                                        <p:attrNameLst>
+                                          <p:attrName>ppt_y</p:attrName>
+                                        </p:attrNameLst>
+                                      </p:cBhvr>
+                                      <p:tavLst>
+                                        <p:tav tm="0">
+                                          <p:val>
+                                            <p:strVal val="1+#ppt_h/2"/>
+                                          </p:val>
+                                        </p:tav>
+                                        <p:tav tm="100000">
+                                          <p:val>
+                                            <p:strVal val="#ppt_y"/>
+                                          </p:val>
+                                        </p:tav>
+                                      </p:tavLst>
+                                    </p:anim>
+                                  </p:childTnLst>
+                                </p:cTn>
+                              </p:par>
+                              <p:par>
+                                <p:cTn id="13" presetID="2" presetClass="entr" presetSubtype="4" fill="hold" grpId="0" nodeType="withEffect">
+                                  <p:stCondLst>
+                                    <p:cond delay="0"/>
+                                  </p:stCondLst>
+                                  <p:childTnLst>
+                                    <p:set>
+                                      <p:cBhvr>
+                                        <p:cTn id="14" dur="1" fill="hold">
+                                          <p:stCondLst>
+                                            <p:cond delay="0"/>
+                                          </p:stCondLst>
+                                        </p:cTn>
+                                        <p:tgtEl>
+                                          <p:spTgt spid="23"/>
+                                        </p:tgtEl>
+                                        <p:attrNameLst>
+                                          <p:attrName>style.visibility</p:attrName>
+                                        </p:attrNameLst>
+                                      </p:cBhvr>
+                                      <p:to>
+                                        <p:strVal val="visible"/>
+                                      </p:to>
+                                    </p:set>
+                                    <p:anim calcmode="lin" valueType="num">
+                                      <p:cBhvr additive="base">
+                                        <p:cTn id="15" dur="500" fill="hold"/>
+                                        <p:tgtEl>
+                                          <p:spTgt spid="23"/>
+                                        </p:tgtEl>
+                                        <p:attrNameLst>
+                                          <p:attrName>ppt_x</p:attrName>
+                                        </p:attrNameLst>
+                                      </p:cBhvr>
+                                      <p:tavLst>
+                                        <p:tav tm="0">
+                                          <p:val>
+                                            <p:strVal val="#ppt_x"/>
+                                          </p:val>
+                                        </p:tav>
+                                        <p:tav tm="100000">
+                                          <p:val>
+                                            <p:strVal val="#ppt_x"/>
+                                          </p:val>
+                                        </p:tav>
+                                      </p:tavLst>
+                                    </p:anim>
+                                    <p:anim calcmode="lin" valueType="num">
+                                      <p:cBhvr additive="base">
+                                        <p:cTn id="16" dur="500" fill="hold"/>
+                                        <p:tgtEl>
+                                          <p:spTgt spid="23"/>
+                                        </p:tgtEl>
+                                        <p:attrNameLst>
+                                          <p:attrName>ppt_y</p:attrName>
+                                        </p:attrNameLst>
+                                      </p:cBhvr>
+                                      <p:tavLst>
+                                        <p:tav tm="0">
+                                          <p:val>
+                                            <p:strVal val="1+#ppt_h/2"/>
+                                          </p:val>
+                                        </p:tav>
+                                        <p:tav tm="100000">
+                                          <p:val>
+                                            <p:strVal val="#ppt_y"/>
+                                          </p:val>
+                                        </p:tav>
+                                      </p:tavLst>
+                                    </p:anim>
+                                  </p:childTnLst>
+                                </p:cTn>
+                              </p:par>
+                            </p:childTnLst>
+                          </p:cTn>
+                        </p:par>
+                      </p:childTnLst>
+                    </p:cTn>
+                  </p:par>
+                  <p:par>
+                    <p:cTn id="17" fill="hold">
+                      <p:stCondLst>
+                        <p:cond delay="indefinite"/>
+                      </p:stCondLst>
+                      <p:childTnLst>
+                        <p:par>
+                          <p:cTn id="18" fill="hold">
+                            <p:stCondLst>
+                              <p:cond delay="0"/>
+                            </p:stCondLst>
+                            <p:childTnLst>
+                              <p:par>
+                                <p:cTn id="19" presetID="2" presetClass="entr" presetSubtype="4" fill="hold" nodeType="clickEffect">
+                                  <p:stCondLst>
+                                    <p:cond delay="0"/>
+                                  </p:stCondLst>
+                                  <p:childTnLst>
+                                    <p:set>
+                                      <p:cBhvr>
+                                        <p:cTn id="20" dur="1" fill="hold">
+                                          <p:stCondLst>
+                                            <p:cond delay="0"/>
+                                          </p:stCondLst>
+                                        </p:cTn>
+                                        <p:tgtEl>
+                                          <p:spTgt spid="5"/>
+                                        </p:tgtEl>
+                                        <p:attrNameLst>
+                                          <p:attrName>style.visibility</p:attrName>
+                                        </p:attrNameLst>
+                                      </p:cBhvr>
+                                      <p:to>
+                                        <p:strVal val="visible"/>
+                                      </p:to>
+                                    </p:set>
+                                    <p:anim calcmode="lin" valueType="num">
+                                      <p:cBhvr additive="base">
+                                        <p:cTn id="21" dur="500" fill="hold"/>
+                                        <p:tgtEl>
+                                          <p:spTgt spid="5"/>
+                                        </p:tgtEl>
+                                        <p:attrNameLst>
+                                          <p:attrName>ppt_x</p:attrName>
+                                        </p:attrNameLst>
+                                      </p:cBhvr>
+                                      <p:tavLst>
+                                        <p:tav tm="0">
+                                          <p:val>
+                                            <p:strVal val="#ppt_x"/>
+                                          </p:val>
+                                        </p:tav>
+                                        <p:tav tm="100000">
+                                          <p:val>
+                                            <p:strVal val="#ppt_x"/>
+                                          </p:val>
+                                        </p:tav>
+                                      </p:tavLst>
+                                    </p:anim>
+                                    <p:anim calcmode="lin" valueType="num">
+                                      <p:cBhvr additive="base">
+                                        <p:cTn id="22" dur="500" fill="hold"/>
+                                        <p:tgtEl>
+                                          <p:spTgt spid="5"/>
+                                        </p:tgtEl>
+                                        <p:attrNameLst>
+                                          <p:attrName>ppt_y</p:attrName>
+                                        </p:attrNameLst>
+                                      </p:cBhvr>
+                                      <p:tavLst>
+                                        <p:tav tm="0">
+                                          <p:val>
+                                            <p:strVal val="1+#ppt_h/2"/>
+                                          </p:val>
+                                        </p:tav>
+                                        <p:tav tm="100000">
+                                          <p:val>
+                                            <p:strVal val="#ppt_y"/>
+                                          </p:val>
+                                        </p:tav>
+                                      </p:tavLst>
+                                    </p:anim>
+                                  </p:childTnLst>
+                                </p:cTn>
+                              </p:par>
+                              <p:par>
+                                <p:cTn id="23" presetID="2" presetClass="entr" presetSubtype="4" fill="hold" grpId="0" nodeType="withEffect">
+                                  <p:stCondLst>
+                                    <p:cond delay="0"/>
+                                  </p:stCondLst>
+                                  <p:childTnLst>
+                                    <p:set>
+                                      <p:cBhvr>
+                                        <p:cTn id="24" dur="1" fill="hold">
+                                          <p:stCondLst>
+                                            <p:cond delay="0"/>
+                                          </p:stCondLst>
+                                        </p:cTn>
+                                        <p:tgtEl>
+                                          <p:spTgt spid="32"/>
+                                        </p:tgtEl>
+                                        <p:attrNameLst>
+                                          <p:attrName>style.visibility</p:attrName>
+                                        </p:attrNameLst>
+                                      </p:cBhvr>
+                                      <p:to>
+                                        <p:strVal val="visible"/>
+                                      </p:to>
+                                    </p:set>
+                                    <p:anim calcmode="lin" valueType="num">
+                                      <p:cBhvr additive="base">
+                                        <p:cTn id="25" dur="500" fill="hold"/>
+                                        <p:tgtEl>
+                                          <p:spTgt spid="32"/>
+                                        </p:tgtEl>
+                                        <p:attrNameLst>
+                                          <p:attrName>ppt_x</p:attrName>
+                                        </p:attrNameLst>
+                                      </p:cBhvr>
+                                      <p:tavLst>
+                                        <p:tav tm="0">
+                                          <p:val>
+                                            <p:strVal val="#ppt_x"/>
+                                          </p:val>
+                                        </p:tav>
+                                        <p:tav tm="100000">
+                                          <p:val>
+                                            <p:strVal val="#ppt_x"/>
+                                          </p:val>
+                                        </p:tav>
+                                      </p:tavLst>
+                                    </p:anim>
+                                    <p:anim calcmode="lin" valueType="num">
+                                      <p:cBhvr additive="base">
+                                        <p:cTn id="26" dur="500" fill="hold"/>
+                                        <p:tgtEl>
+                                          <p:spTgt spid="32"/>
+                                        </p:tgtEl>
+                                        <p:attrNameLst>
+                                          <p:attrName>ppt_y</p:attrName>
+                                        </p:attrNameLst>
+                                      </p:cBhvr>
+                                      <p:tavLst>
+                                        <p:tav tm="0">
+                                          <p:val>
+                                            <p:strVal val="1+#ppt_h/2"/>
+                                          </p:val>
+                                        </p:tav>
+                                        <p:tav tm="100000">
+                                          <p:val>
+                                            <p:strVal val="#ppt_y"/>
+                                          </p:val>
+                                        </p:tav>
+                                      </p:tavLst>
+                                    </p:anim>
+                                  </p:childTnLst>
+                                </p:cTn>
+                              </p:par>
+                              <p:par>
+                                <p:cTn id="27" presetID="2" presetClass="entr" presetSubtype="4" fill="hold" grpId="0" nodeType="withEffect">
+                                  <p:stCondLst>
+                                    <p:cond delay="0"/>
+                                  </p:stCondLst>
+                                  <p:childTnLst>
+                                    <p:set>
+                                      <p:cBhvr>
+                                        <p:cTn id="28" dur="1" fill="hold">
+                                          <p:stCondLst>
+                                            <p:cond delay="0"/>
+                                          </p:stCondLst>
+                                        </p:cTn>
+                                        <p:tgtEl>
+                                          <p:spTgt spid="25"/>
+                                        </p:tgtEl>
+                                        <p:attrNameLst>
+                                          <p:attrName>style.visibility</p:attrName>
+                                        </p:attrNameLst>
+                                      </p:cBhvr>
+                                      <p:to>
+                                        <p:strVal val="visible"/>
+                                      </p:to>
+                                    </p:set>
+                                    <p:anim calcmode="lin" valueType="num">
+                                      <p:cBhvr additive="base">
+                                        <p:cTn id="29" dur="500" fill="hold"/>
+                                        <p:tgtEl>
+                                          <p:spTgt spid="25"/>
+                                        </p:tgtEl>
+                                        <p:attrNameLst>
+                                          <p:attrName>ppt_x</p:attrName>
+                                        </p:attrNameLst>
+                                      </p:cBhvr>
+                                      <p:tavLst>
+                                        <p:tav tm="0">
+                                          <p:val>
+                                            <p:strVal val="#ppt_x"/>
+                                          </p:val>
+                                        </p:tav>
+                                        <p:tav tm="100000">
+                                          <p:val>
+                                            <p:strVal val="#ppt_x"/>
+                                          </p:val>
+                                        </p:tav>
+                                      </p:tavLst>
+                                    </p:anim>
+                                    <p:anim calcmode="lin" valueType="num">
+                                      <p:cBhvr additive="base">
+                                        <p:cTn id="30" dur="500" fill="hold"/>
+                                        <p:tgtEl>
+                                          <p:spTgt spid="25"/>
+                                        </p:tgtEl>
+                                        <p:attrNameLst>
+                                          <p:attrName>ppt_y</p:attrName>
+                                        </p:attrNameLst>
+                                      </p:cBhvr>
+                                      <p:tavLst>
+                                        <p:tav tm="0">
+                                          <p:val>
+                                            <p:strVal val="1+#ppt_h/2"/>
+                                          </p:val>
+                                        </p:tav>
+                                        <p:tav tm="100000">
+                                          <p:val>
+                                            <p:strVal val="#ppt_y"/>
+                                          </p:val>
+                                        </p:tav>
+                                      </p:tavLst>
+                                    </p:anim>
+                                  </p:childTnLst>
+                                </p:cTn>
+                              </p:par>
+                            </p:childTnLst>
+                          </p:cTn>
+                        </p:par>
+                      </p:childTnLst>
+                    </p:cTn>
+                  </p:par>
+                  <p:par>
+                    <p:cTn id="31" fill="hold">
+                      <p:stCondLst>
+                        <p:cond delay="indefinite"/>
+                      </p:stCondLst>
+                      <p:childTnLst>
+                        <p:par>
+                          <p:cTn id="32" fill="hold">
+                            <p:stCondLst>
+                              <p:cond delay="0"/>
+                            </p:stCondLst>
+                            <p:childTnLst>
+                              <p:par>
+                                <p:cTn id="33" presetID="2" presetClass="entr" presetSubtype="4" fill="hold" grpId="0" nodeType="clickEffect">
+                                  <p:stCondLst>
+                                    <p:cond delay="0"/>
+                                  </p:stCondLst>
+                                  <p:childTnLst>
+                                    <p:set>
+                                      <p:cBhvr>
+                                        <p:cTn id="34" dur="1" fill="hold">
+                                          <p:stCondLst>
+                                            <p:cond delay="0"/>
+                                          </p:stCondLst>
+                                        </p:cTn>
+                                        <p:tgtEl>
+                                          <p:spTgt spid="6"/>
+                                        </p:tgtEl>
+                                        <p:attrNameLst>
+                                          <p:attrName>style.visibility</p:attrName>
+                                        </p:attrNameLst>
+                                      </p:cBhvr>
+                                      <p:to>
+                                        <p:strVal val="visible"/>
+                                      </p:to>
+                                    </p:set>
+                                    <p:anim calcmode="lin" valueType="num">
+                                      <p:cBhvr additive="base">
+                                        <p:cTn id="35" dur="500" fill="hold"/>
+                                        <p:tgtEl>
+                                          <p:spTgt spid="6"/>
+                                        </p:tgtEl>
+                                        <p:attrNameLst>
+                                          <p:attrName>ppt_x</p:attrName>
+                                        </p:attrNameLst>
+                                      </p:cBhvr>
+                                      <p:tavLst>
+                                        <p:tav tm="0">
+                                          <p:val>
+                                            <p:strVal val="#ppt_x"/>
+                                          </p:val>
+                                        </p:tav>
+                                        <p:tav tm="100000">
+                                          <p:val>
+                                            <p:strVal val="#ppt_x"/>
+                                          </p:val>
+                                        </p:tav>
+                                      </p:tavLst>
+                                    </p:anim>
+                                    <p:anim calcmode="lin" valueType="num">
+                                      <p:cBhvr additive="base">
+                                        <p:cTn id="36" dur="500" fill="hold"/>
+                                        <p:tgtEl>
+                                          <p:spTgt spid="6"/>
+                                        </p:tgtEl>
+                                        <p:attrNameLst>
+                                          <p:attrName>ppt_y</p:attrName>
+                                        </p:attrNameLst>
+                                      </p:cBhvr>
+                                      <p:tavLst>
+                                        <p:tav tm="0">
+                                          <p:val>
+                                            <p:strVal val="1+#ppt_h/2"/>
+                                          </p:val>
+                                        </p:tav>
+                                        <p:tav tm="100000">
+                                          <p:val>
+                                            <p:strVal val="#ppt_y"/>
+                                          </p:val>
+                                        </p:tav>
+                                      </p:tavLst>
+                                    </p:anim>
+                                  </p:childTnLst>
+                                </p:cTn>
+                              </p:par>
+                            </p:childTnLst>
+                          </p:cTn>
+                        </p:par>
+                      </p:childTnLst>
+                    </p:cTn>
+                  </p:par>
+                </p:childTnLst>
+              </p:cTn>
+              <p:prevCondLst>
+                <p:cond evt="onPrev" delay="0">
+                  <p:tgtEl>
+                    <p:sldTgt/>
+                  </p:tgtEl>
+                </p:cond>
+              </p:prevCondLst>
+              <p:nextCondLst>
+                <p:cond evt="onNext" delay="0">
+                  <p:tgtEl>
+                    <p:sldTgt/>
+                  </p:tgtEl>
+                </p:cond>
+              </p:nextCondLst>
+            </p:seq>
+          </p:childTnLst>
+        </p:cTn>
+      </p:par>
+    </p:tnLst>
+    <p:bldLst>
+      <p:bldP spid="25" grpId="0" animBg="1"/>
+      <p:bldP spid="23" grpId="0" animBg="1"/>
+      <p:bldP spid="6" grpId="0"/>
+      <p:bldP spid="30" grpId="0" animBg="1"/>
+      <p:bldP spid="32" grpId="0" animBg="1"/>
+    </p:bldLst>
+  </p:timing>
 </p:sld>
 </file>
 
@@ -9937,7 +9971,7 @@
         <p:spPr>
           <a:xfrm>
             <a:off x="11521440" y="6510528"/>
-            <a:ext cx="457200" cy="274320"/>
+            <a:ext cx="457200" cy="146194"/>
           </a:xfrm>
           <a:prstGeom prst="rect">
             <a:avLst/>
@@ -9956,14 +9990,29 @@
               </a:lnSpc>
             </a:pPr>
             <a:r>
-              <a:rPr sz="950" b="0" i="0">
+              <a:rPr sz="950" b="0" i="0" dirty="0">
                 <a:solidFill>
                   <a:srgbClr val="999999"/>
                 </a:solidFill>
                 <a:latin typeface="Calibri"/>
               </a:rPr>
-              <a:t>12</a:t>
-            </a:r>
+              <a:t>1</a:t>
+            </a:r>
+            <a:r>
+              <a:rPr lang="en-GB" sz="950" b="0" i="0" dirty="0">
+                <a:solidFill>
+                  <a:srgbClr val="999999"/>
+                </a:solidFill>
+                <a:latin typeface="Calibri"/>
+              </a:rPr>
+              <a:t>4</a:t>
+            </a:r>
+            <a:endParaRPr sz="950" b="0" i="0" dirty="0">
+              <a:solidFill>
+                <a:srgbClr val="999999"/>
+              </a:solidFill>
+              <a:latin typeface="Calibri"/>
+            </a:endParaRPr>
           </a:p>
         </p:txBody>
       </p:sp>
@@ -11191,7 +11240,7 @@
                 <a:ea typeface="Calibri" pitchFamily="34" charset="-122"/>
                 <a:cs typeface="Calibri" pitchFamily="34" charset="-120"/>
               </a:rPr>
-              <a:t>13</a:t>
+              <a:t>15</a:t>
             </a:r>
             <a:endParaRPr lang="en-US" sz="1000" dirty="0"/>
           </a:p>
@@ -12116,7 +12165,7 @@
         <p:spPr>
           <a:xfrm>
             <a:off x="11521440" y="6510528"/>
-            <a:ext cx="457200" cy="274320"/>
+            <a:ext cx="457200" cy="146194"/>
           </a:xfrm>
           <a:prstGeom prst="rect">
             <a:avLst/>
@@ -12135,14 +12184,29 @@
               </a:lnSpc>
             </a:pPr>
             <a:r>
-              <a:rPr sz="950" b="0" i="0">
+              <a:rPr sz="950" b="0" i="0" dirty="0">
                 <a:solidFill>
                   <a:srgbClr val="999999"/>
                 </a:solidFill>
                 <a:latin typeface="Calibri"/>
               </a:rPr>
-              <a:t>14</a:t>
-            </a:r>
+              <a:t>1</a:t>
+            </a:r>
+            <a:r>
+              <a:rPr lang="en-GB" sz="950" b="0" i="0" dirty="0">
+                <a:solidFill>
+                  <a:srgbClr val="999999"/>
+                </a:solidFill>
+                <a:latin typeface="Calibri"/>
+              </a:rPr>
+              <a:t>6</a:t>
+            </a:r>
+            <a:endParaRPr sz="950" b="0" i="0" dirty="0">
+              <a:solidFill>
+                <a:srgbClr val="999999"/>
+              </a:solidFill>
+              <a:latin typeface="Calibri"/>
+            </a:endParaRPr>
           </a:p>
         </p:txBody>
       </p:sp>
@@ -13139,7 +13203,7 @@
         <p:spPr>
           <a:xfrm>
             <a:off x="11521440" y="6510528"/>
-            <a:ext cx="457200" cy="274320"/>
+            <a:ext cx="457200" cy="146194"/>
           </a:xfrm>
           <a:prstGeom prst="rect">
             <a:avLst/>
@@ -13158,14 +13222,29 @@
               </a:lnSpc>
             </a:pPr>
             <a:r>
-              <a:rPr sz="950" b="0" i="0">
+              <a:rPr sz="950" b="0" i="0" dirty="0">
                 <a:solidFill>
                   <a:srgbClr val="999999"/>
                 </a:solidFill>
                 <a:latin typeface="Calibri"/>
               </a:rPr>
-              <a:t>15</a:t>
-            </a:r>
+              <a:t>1</a:t>
+            </a:r>
+            <a:r>
+              <a:rPr lang="en-GB" sz="950" b="0" i="0" dirty="0">
+                <a:solidFill>
+                  <a:srgbClr val="999999"/>
+                </a:solidFill>
+                <a:latin typeface="Calibri"/>
+              </a:rPr>
+              <a:t>7</a:t>
+            </a:r>
+            <a:endParaRPr sz="950" b="0" i="0" dirty="0">
+              <a:solidFill>
+                <a:srgbClr val="999999"/>
+              </a:solidFill>
+              <a:latin typeface="Calibri"/>
+            </a:endParaRPr>
           </a:p>
         </p:txBody>
       </p:sp>
@@ -13249,8 +13328,8 @@
         </p:nvSpPr>
         <p:spPr>
           <a:xfrm>
-            <a:off x="685800" y="658368"/>
-            <a:ext cx="10789920" cy="914400"/>
+            <a:off x="777240" y="658368"/>
+            <a:ext cx="10515600" cy="442237"/>
           </a:xfrm>
           <a:prstGeom prst="rect">
             <a:avLst/>
@@ -13269,111 +13348,41 @@
               </a:lnSpc>
             </a:pPr>
             <a:r>
-              <a:rPr sz="3000" b="1" i="0">
+              <a:rPr lang="en-GB" sz="3000" b="1" i="0" dirty="0">
                 <a:solidFill>
                   <a:srgbClr val="1A1A1A"/>
                 </a:solidFill>
                 <a:latin typeface="Georgia"/>
               </a:rPr>
-              <a:t>Fairness Requires More Than a Better Model</a:t>
-            </a:r>
-          </a:p>
-        </p:txBody>
-      </p:sp>
-      <p:sp>
-        <p:nvSpPr>
-          <p:cNvPr id="4" name="TextBox 3"/>
-          <p:cNvSpPr txBox="1"/>
-          <p:nvPr/>
-        </p:nvSpPr>
-        <p:spPr>
-          <a:xfrm>
-            <a:off x="777240" y="1783080"/>
-            <a:ext cx="10515600" cy="1828800"/>
-          </a:xfrm>
-          <a:prstGeom prst="rect">
-            <a:avLst/>
-          </a:prstGeom>
-          <a:noFill/>
-        </p:spPr>
-        <p:txBody>
-          <a:bodyPr wrap="square" lIns="0" tIns="0" rIns="0" bIns="0" anchor="t">
-            <a:spAutoFit/>
-          </a:bodyPr>
-          <a:lstStyle/>
-          <a:p>
-            <a:pPr algn="l">
-              <a:lnSpc>
-                <a:spcPct val="150000"/>
-              </a:lnSpc>
-            </a:pPr>
-            <a:r>
-              <a:rPr sz="1800" b="0" i="0">
-                <a:solidFill>
-                  <a:srgbClr val="1A1A1A"/>
-                </a:solidFill>
-                <a:latin typeface="Calibri"/>
-              </a:rPr>
-              <a:t>Three of six procedural fairness criteria passed at baseline. Mitigation narrowed the gender recall gap and strengthened oversight — at a modest accuracy cost — without fully resolving either. The priority that matters most now is correctability: the model's weakest technical result, and the public's strongest expectation.</a:t>
-            </a:r>
-          </a:p>
-        </p:txBody>
-      </p:sp>
-      <p:sp>
-        <p:nvSpPr>
-          <p:cNvPr id="5" name="TextBox 4"/>
-          <p:cNvSpPr txBox="1"/>
-          <p:nvPr/>
-        </p:nvSpPr>
-        <p:spPr>
-          <a:xfrm>
-            <a:off x="777240" y="3794760"/>
-            <a:ext cx="5486400" cy="320040"/>
-          </a:xfrm>
-          <a:prstGeom prst="rect">
-            <a:avLst/>
-          </a:prstGeom>
-          <a:noFill/>
-        </p:spPr>
-        <p:txBody>
-          <a:bodyPr wrap="square" lIns="0" tIns="0" rIns="0" bIns="0" anchor="t">
-            <a:spAutoFit/>
-          </a:bodyPr>
-          <a:lstStyle/>
-          <a:p>
-            <a:pPr algn="l">
-              <a:lnSpc>
-                <a:spcPct val="100000"/>
-              </a:lnSpc>
-            </a:pPr>
-            <a:r>
-              <a:rPr sz="1250" b="1" i="0">
-                <a:solidFill>
-                  <a:srgbClr val="C9748F"/>
-                </a:solidFill>
-                <a:latin typeface="Calibri"/>
-              </a:rPr>
-              <a:t>AFTER MITIGATION</a:t>
-            </a:r>
-          </a:p>
-        </p:txBody>
-      </p:sp>
-      <p:sp>
-        <p:nvSpPr>
-          <p:cNvPr id="6" name="Oval 5"/>
+              <a:t>Fairness is a Process, Not a Score </a:t>
+            </a:r>
+            <a:endParaRPr sz="3000" b="1" i="0" dirty="0">
+              <a:solidFill>
+                <a:srgbClr val="1A1A1A"/>
+              </a:solidFill>
+              <a:latin typeface="Georgia"/>
+            </a:endParaRPr>
+          </a:p>
+        </p:txBody>
+      </p:sp>
+      <p:sp>
+        <p:nvSpPr>
+          <p:cNvPr id="18" name="Rounded Rectangle 17"/>
           <p:cNvSpPr/>
           <p:nvPr/>
         </p:nvSpPr>
         <p:spPr>
           <a:xfrm>
-            <a:off x="1097280" y="4526279"/>
-            <a:ext cx="274320" cy="274320"/>
-          </a:xfrm>
-          <a:prstGeom prst="ellipse">
-            <a:avLst/>
+            <a:off x="914400" y="5192232"/>
+            <a:ext cx="10607040" cy="685800"/>
+          </a:xfrm>
+          <a:prstGeom prst="roundRect">
+            <a:avLst>
+              <a:gd name="adj" fmla="val 50000"/>
+            </a:avLst>
           </a:prstGeom>
           <a:solidFill>
-            <a:srgbClr val="2D6A4F"/>
+            <a:srgbClr val="FBEEF1"/>
           </a:solidFill>
           <a:ln>
             <a:noFill/>
@@ -13405,567 +13414,6 @@
       </p:sp>
       <p:sp>
         <p:nvSpPr>
-          <p:cNvPr id="7" name="TextBox 6"/>
-          <p:cNvSpPr txBox="1"/>
-          <p:nvPr/>
-        </p:nvSpPr>
-        <p:spPr>
-          <a:xfrm>
-            <a:off x="434340" y="4864607"/>
-            <a:ext cx="1600200" cy="457200"/>
-          </a:xfrm>
-          <a:prstGeom prst="rect">
-            <a:avLst/>
-          </a:prstGeom>
-          <a:noFill/>
-        </p:spPr>
-        <p:txBody>
-          <a:bodyPr wrap="square" lIns="0" tIns="0" rIns="0" bIns="0" anchor="t">
-            <a:spAutoFit/>
-          </a:bodyPr>
-          <a:lstStyle/>
-          <a:p>
-            <a:pPr algn="ctr">
-              <a:lnSpc>
-                <a:spcPct val="100000"/>
-              </a:lnSpc>
-            </a:pPr>
-            <a:r>
-              <a:rPr sz="1200" b="0" i="0">
-                <a:solidFill>
-                  <a:srgbClr val="666666"/>
-                </a:solidFill>
-                <a:latin typeface="Calibri"/>
-              </a:rPr>
-              <a:t>Accuracy</a:t>
-            </a:r>
-          </a:p>
-        </p:txBody>
-      </p:sp>
-      <p:sp>
-        <p:nvSpPr>
-          <p:cNvPr id="8" name="Oval 7"/>
-          <p:cNvSpPr/>
-          <p:nvPr/>
-        </p:nvSpPr>
-        <p:spPr>
-          <a:xfrm>
-            <a:off x="2788920" y="4526279"/>
-            <a:ext cx="274320" cy="274320"/>
-          </a:xfrm>
-          <a:prstGeom prst="ellipse">
-            <a:avLst/>
-          </a:prstGeom>
-          <a:solidFill>
-            <a:srgbClr val="C9A227"/>
-          </a:solidFill>
-          <a:ln>
-            <a:noFill/>
-          </a:ln>
-          <a:effectLst/>
-        </p:spPr>
-        <p:style>
-          <a:lnRef idx="1">
-            <a:schemeClr val="accent1"/>
-          </a:lnRef>
-          <a:fillRef idx="3">
-            <a:schemeClr val="accent1"/>
-          </a:fillRef>
-          <a:effectRef idx="2">
-            <a:schemeClr val="accent1"/>
-          </a:effectRef>
-          <a:fontRef idx="minor">
-            <a:schemeClr val="lt1"/>
-          </a:fontRef>
-        </p:style>
-        <p:txBody>
-          <a:bodyPr rtlCol="0" anchor="ctr"/>
-          <a:lstStyle/>
-          <a:p>
-            <a:pPr algn="ctr"/>
-            <a:endParaRPr/>
-          </a:p>
-        </p:txBody>
-      </p:sp>
-      <p:sp>
-        <p:nvSpPr>
-          <p:cNvPr id="9" name="TextBox 8"/>
-          <p:cNvSpPr txBox="1"/>
-          <p:nvPr/>
-        </p:nvSpPr>
-        <p:spPr>
-          <a:xfrm>
-            <a:off x="2125980" y="4864607"/>
-            <a:ext cx="1600200" cy="457200"/>
-          </a:xfrm>
-          <a:prstGeom prst="rect">
-            <a:avLst/>
-          </a:prstGeom>
-          <a:noFill/>
-        </p:spPr>
-        <p:txBody>
-          <a:bodyPr wrap="square" lIns="0" tIns="0" rIns="0" bIns="0" anchor="t">
-            <a:spAutoFit/>
-          </a:bodyPr>
-          <a:lstStyle/>
-          <a:p>
-            <a:pPr algn="ctr">
-              <a:lnSpc>
-                <a:spcPct val="100000"/>
-              </a:lnSpc>
-            </a:pPr>
-            <a:r>
-              <a:rPr sz="1200" b="0" i="0">
-                <a:solidFill>
-                  <a:srgbClr val="666666"/>
-                </a:solidFill>
-                <a:latin typeface="Calibri"/>
-              </a:rPr>
-              <a:t>Bias</a:t>
-            </a:r>
-          </a:p>
-          <a:p>
-            <a:pPr algn="ctr">
-              <a:lnSpc>
-                <a:spcPct val="100000"/>
-              </a:lnSpc>
-            </a:pPr>
-            <a:r>
-              <a:rPr sz="1200" b="0" i="0">
-                <a:solidFill>
-                  <a:srgbClr val="666666"/>
-                </a:solidFill>
-                <a:latin typeface="Calibri"/>
-              </a:rPr>
-              <a:t>Suppression</a:t>
-            </a:r>
-          </a:p>
-        </p:txBody>
-      </p:sp>
-      <p:sp>
-        <p:nvSpPr>
-          <p:cNvPr id="10" name="Oval 9"/>
-          <p:cNvSpPr/>
-          <p:nvPr/>
-        </p:nvSpPr>
-        <p:spPr>
-          <a:xfrm>
-            <a:off x="4480560" y="4526279"/>
-            <a:ext cx="274320" cy="274320"/>
-          </a:xfrm>
-          <a:prstGeom prst="ellipse">
-            <a:avLst/>
-          </a:prstGeom>
-          <a:noFill/>
-          <a:ln w="30480">
-            <a:solidFill>
-              <a:srgbClr val="9D0208"/>
-            </a:solidFill>
-          </a:ln>
-          <a:effectLst/>
-        </p:spPr>
-        <p:style>
-          <a:lnRef idx="1">
-            <a:schemeClr val="accent1"/>
-          </a:lnRef>
-          <a:fillRef idx="3">
-            <a:schemeClr val="accent1"/>
-          </a:fillRef>
-          <a:effectRef idx="2">
-            <a:schemeClr val="accent1"/>
-          </a:effectRef>
-          <a:fontRef idx="minor">
-            <a:schemeClr val="lt1"/>
-          </a:fontRef>
-        </p:style>
-        <p:txBody>
-          <a:bodyPr rtlCol="0" anchor="ctr"/>
-          <a:lstStyle/>
-          <a:p>
-            <a:pPr algn="ctr"/>
-            <a:endParaRPr/>
-          </a:p>
-        </p:txBody>
-      </p:sp>
-      <p:sp>
-        <p:nvSpPr>
-          <p:cNvPr id="11" name="TextBox 10"/>
-          <p:cNvSpPr txBox="1"/>
-          <p:nvPr/>
-        </p:nvSpPr>
-        <p:spPr>
-          <a:xfrm>
-            <a:off x="3817620" y="4864607"/>
-            <a:ext cx="1600200" cy="457200"/>
-          </a:xfrm>
-          <a:prstGeom prst="rect">
-            <a:avLst/>
-          </a:prstGeom>
-          <a:noFill/>
-        </p:spPr>
-        <p:txBody>
-          <a:bodyPr wrap="square" lIns="0" tIns="0" rIns="0" bIns="0" anchor="t">
-            <a:spAutoFit/>
-          </a:bodyPr>
-          <a:lstStyle/>
-          <a:p>
-            <a:pPr algn="ctr">
-              <a:lnSpc>
-                <a:spcPct val="100000"/>
-              </a:lnSpc>
-            </a:pPr>
-            <a:r>
-              <a:rPr sz="1200" b="0" i="0">
-                <a:solidFill>
-                  <a:srgbClr val="666666"/>
-                </a:solidFill>
-                <a:latin typeface="Calibri"/>
-              </a:rPr>
-              <a:t>Representativeness</a:t>
-            </a:r>
-          </a:p>
-        </p:txBody>
-      </p:sp>
-      <p:sp>
-        <p:nvSpPr>
-          <p:cNvPr id="12" name="Oval 11"/>
-          <p:cNvSpPr/>
-          <p:nvPr/>
-        </p:nvSpPr>
-        <p:spPr>
-          <a:xfrm>
-            <a:off x="6172200" y="4526279"/>
-            <a:ext cx="274320" cy="274320"/>
-          </a:xfrm>
-          <a:prstGeom prst="ellipse">
-            <a:avLst/>
-          </a:prstGeom>
-          <a:solidFill>
-            <a:srgbClr val="2D6A4F"/>
-          </a:solidFill>
-          <a:ln>
-            <a:noFill/>
-          </a:ln>
-          <a:effectLst/>
-        </p:spPr>
-        <p:style>
-          <a:lnRef idx="1">
-            <a:schemeClr val="accent1"/>
-          </a:lnRef>
-          <a:fillRef idx="3">
-            <a:schemeClr val="accent1"/>
-          </a:fillRef>
-          <a:effectRef idx="2">
-            <a:schemeClr val="accent1"/>
-          </a:effectRef>
-          <a:fontRef idx="minor">
-            <a:schemeClr val="lt1"/>
-          </a:fontRef>
-        </p:style>
-        <p:txBody>
-          <a:bodyPr rtlCol="0" anchor="ctr"/>
-          <a:lstStyle/>
-          <a:p>
-            <a:pPr algn="ctr"/>
-            <a:endParaRPr/>
-          </a:p>
-        </p:txBody>
-      </p:sp>
-      <p:sp>
-        <p:nvSpPr>
-          <p:cNvPr id="13" name="TextBox 12"/>
-          <p:cNvSpPr txBox="1"/>
-          <p:nvPr/>
-        </p:nvSpPr>
-        <p:spPr>
-          <a:xfrm>
-            <a:off x="5509260" y="4864607"/>
-            <a:ext cx="1600200" cy="457200"/>
-          </a:xfrm>
-          <a:prstGeom prst="rect">
-            <a:avLst/>
-          </a:prstGeom>
-          <a:noFill/>
-        </p:spPr>
-        <p:txBody>
-          <a:bodyPr wrap="square" lIns="0" tIns="0" rIns="0" bIns="0" anchor="t">
-            <a:spAutoFit/>
-          </a:bodyPr>
-          <a:lstStyle/>
-          <a:p>
-            <a:pPr algn="ctr">
-              <a:lnSpc>
-                <a:spcPct val="100000"/>
-              </a:lnSpc>
-            </a:pPr>
-            <a:r>
-              <a:rPr sz="1200" b="0" i="0">
-                <a:solidFill>
-                  <a:srgbClr val="666666"/>
-                </a:solidFill>
-                <a:latin typeface="Calibri"/>
-              </a:rPr>
-              <a:t>Consistency</a:t>
-            </a:r>
-          </a:p>
-        </p:txBody>
-      </p:sp>
-      <p:sp>
-        <p:nvSpPr>
-          <p:cNvPr id="14" name="Oval 13"/>
-          <p:cNvSpPr/>
-          <p:nvPr/>
-        </p:nvSpPr>
-        <p:spPr>
-          <a:xfrm>
-            <a:off x="7863840" y="4526279"/>
-            <a:ext cx="274320" cy="274320"/>
-          </a:xfrm>
-          <a:prstGeom prst="ellipse">
-            <a:avLst/>
-          </a:prstGeom>
-          <a:solidFill>
-            <a:srgbClr val="C9A227"/>
-          </a:solidFill>
-          <a:ln>
-            <a:noFill/>
-          </a:ln>
-          <a:effectLst/>
-        </p:spPr>
-        <p:style>
-          <a:lnRef idx="1">
-            <a:schemeClr val="accent1"/>
-          </a:lnRef>
-          <a:fillRef idx="3">
-            <a:schemeClr val="accent1"/>
-          </a:fillRef>
-          <a:effectRef idx="2">
-            <a:schemeClr val="accent1"/>
-          </a:effectRef>
-          <a:fontRef idx="minor">
-            <a:schemeClr val="lt1"/>
-          </a:fontRef>
-        </p:style>
-        <p:txBody>
-          <a:bodyPr rtlCol="0" anchor="ctr"/>
-          <a:lstStyle/>
-          <a:p>
-            <a:pPr algn="ctr"/>
-            <a:endParaRPr/>
-          </a:p>
-        </p:txBody>
-      </p:sp>
-      <p:sp>
-        <p:nvSpPr>
-          <p:cNvPr id="15" name="TextBox 14"/>
-          <p:cNvSpPr txBox="1"/>
-          <p:nvPr/>
-        </p:nvSpPr>
-        <p:spPr>
-          <a:xfrm>
-            <a:off x="7200900" y="4864607"/>
-            <a:ext cx="1600200" cy="457200"/>
-          </a:xfrm>
-          <a:prstGeom prst="rect">
-            <a:avLst/>
-          </a:prstGeom>
-          <a:noFill/>
-        </p:spPr>
-        <p:txBody>
-          <a:bodyPr wrap="square" lIns="0" tIns="0" rIns="0" bIns="0" anchor="t">
-            <a:spAutoFit/>
-          </a:bodyPr>
-          <a:lstStyle/>
-          <a:p>
-            <a:pPr algn="ctr">
-              <a:lnSpc>
-                <a:spcPct val="100000"/>
-              </a:lnSpc>
-            </a:pPr>
-            <a:r>
-              <a:rPr sz="1200" b="0" i="0">
-                <a:solidFill>
-                  <a:srgbClr val="666666"/>
-                </a:solidFill>
-                <a:latin typeface="Calibri"/>
-              </a:rPr>
-              <a:t>Correctability</a:t>
-            </a:r>
-          </a:p>
-        </p:txBody>
-      </p:sp>
-      <p:sp>
-        <p:nvSpPr>
-          <p:cNvPr id="16" name="Oval 15"/>
-          <p:cNvSpPr/>
-          <p:nvPr/>
-        </p:nvSpPr>
-        <p:spPr>
-          <a:xfrm>
-            <a:off x="9555480" y="4526279"/>
-            <a:ext cx="274320" cy="274320"/>
-          </a:xfrm>
-          <a:prstGeom prst="ellipse">
-            <a:avLst/>
-          </a:prstGeom>
-          <a:solidFill>
-            <a:srgbClr val="2D6A4F"/>
-          </a:solidFill>
-          <a:ln>
-            <a:noFill/>
-          </a:ln>
-          <a:effectLst/>
-        </p:spPr>
-        <p:style>
-          <a:lnRef idx="1">
-            <a:schemeClr val="accent1"/>
-          </a:lnRef>
-          <a:fillRef idx="3">
-            <a:schemeClr val="accent1"/>
-          </a:fillRef>
-          <a:effectRef idx="2">
-            <a:schemeClr val="accent1"/>
-          </a:effectRef>
-          <a:fontRef idx="minor">
-            <a:schemeClr val="lt1"/>
-          </a:fontRef>
-        </p:style>
-        <p:txBody>
-          <a:bodyPr rtlCol="0" anchor="ctr"/>
-          <a:lstStyle/>
-          <a:p>
-            <a:pPr algn="ctr"/>
-            <a:endParaRPr/>
-          </a:p>
-        </p:txBody>
-      </p:sp>
-      <p:sp>
-        <p:nvSpPr>
-          <p:cNvPr id="17" name="TextBox 16"/>
-          <p:cNvSpPr txBox="1"/>
-          <p:nvPr/>
-        </p:nvSpPr>
-        <p:spPr>
-          <a:xfrm>
-            <a:off x="8892540" y="4864607"/>
-            <a:ext cx="1600200" cy="457200"/>
-          </a:xfrm>
-          <a:prstGeom prst="rect">
-            <a:avLst/>
-          </a:prstGeom>
-          <a:noFill/>
-        </p:spPr>
-        <p:txBody>
-          <a:bodyPr wrap="square" lIns="0" tIns="0" rIns="0" bIns="0" anchor="t">
-            <a:spAutoFit/>
-          </a:bodyPr>
-          <a:lstStyle/>
-          <a:p>
-            <a:pPr algn="ctr">
-              <a:lnSpc>
-                <a:spcPct val="100000"/>
-              </a:lnSpc>
-            </a:pPr>
-            <a:r>
-              <a:rPr sz="1200" b="0" i="0">
-                <a:solidFill>
-                  <a:srgbClr val="666666"/>
-                </a:solidFill>
-                <a:latin typeface="Calibri"/>
-              </a:rPr>
-              <a:t>Ethicality</a:t>
-            </a:r>
-          </a:p>
-        </p:txBody>
-      </p:sp>
-      <p:sp>
-        <p:nvSpPr>
-          <p:cNvPr id="18" name="Rounded Rectangle 17"/>
-          <p:cNvSpPr/>
-          <p:nvPr/>
-        </p:nvSpPr>
-        <p:spPr>
-          <a:xfrm>
-            <a:off x="777240" y="5623560"/>
-            <a:ext cx="10607040" cy="640080"/>
-          </a:xfrm>
-          <a:prstGeom prst="roundRect">
-            <a:avLst>
-              <a:gd name="adj" fmla="val 50000"/>
-            </a:avLst>
-          </a:prstGeom>
-          <a:solidFill>
-            <a:srgbClr val="FBEEF1"/>
-          </a:solidFill>
-          <a:ln>
-            <a:noFill/>
-          </a:ln>
-          <a:effectLst/>
-        </p:spPr>
-        <p:style>
-          <a:lnRef idx="1">
-            <a:schemeClr val="accent1"/>
-          </a:lnRef>
-          <a:fillRef idx="3">
-            <a:schemeClr val="accent1"/>
-          </a:fillRef>
-          <a:effectRef idx="2">
-            <a:schemeClr val="accent1"/>
-          </a:effectRef>
-          <a:fontRef idx="minor">
-            <a:schemeClr val="lt1"/>
-          </a:fontRef>
-        </p:style>
-        <p:txBody>
-          <a:bodyPr rtlCol="0" anchor="ctr"/>
-          <a:lstStyle/>
-          <a:p>
-            <a:pPr algn="ctr"/>
-            <a:endParaRPr/>
-          </a:p>
-        </p:txBody>
-      </p:sp>
-      <p:sp>
-        <p:nvSpPr>
-          <p:cNvPr id="19" name="TextBox 18"/>
-          <p:cNvSpPr txBox="1"/>
-          <p:nvPr/>
-        </p:nvSpPr>
-        <p:spPr>
-          <a:xfrm>
-            <a:off x="777240" y="5779008"/>
-            <a:ext cx="10607040" cy="365760"/>
-          </a:xfrm>
-          <a:prstGeom prst="rect">
-            <a:avLst/>
-          </a:prstGeom>
-          <a:noFill/>
-        </p:spPr>
-        <p:txBody>
-          <a:bodyPr wrap="square" lIns="0" tIns="0" rIns="0" bIns="0" anchor="t">
-            <a:spAutoFit/>
-          </a:bodyPr>
-          <a:lstStyle/>
-          <a:p>
-            <a:pPr algn="ctr">
-              <a:lnSpc>
-                <a:spcPct val="100000"/>
-              </a:lnSpc>
-            </a:pPr>
-            <a:r>
-              <a:rPr sz="1400" b="1" i="0">
-                <a:solidFill>
-                  <a:srgbClr val="C9748F"/>
-                </a:solidFill>
-                <a:latin typeface="Calibri"/>
-              </a:rPr>
-              <a:t>Fixing fairness needs better data and stronger oversight — not modelling alone.</a:t>
-            </a:r>
-          </a:p>
-        </p:txBody>
-      </p:sp>
-      <p:sp>
-        <p:nvSpPr>
           <p:cNvPr id="20" name="TextBox 19"/>
           <p:cNvSpPr txBox="1"/>
           <p:nvPr/>
@@ -14012,7 +13460,7 @@
         <p:spPr>
           <a:xfrm>
             <a:off x="11521440" y="6510528"/>
-            <a:ext cx="457200" cy="274320"/>
+            <a:ext cx="457200" cy="146194"/>
           </a:xfrm>
           <a:prstGeom prst="rect">
             <a:avLst/>
@@ -14031,13 +13479,163 @@
               </a:lnSpc>
             </a:pPr>
             <a:r>
-              <a:rPr sz="950" b="0" i="0">
+              <a:rPr sz="950" b="0" i="0" dirty="0">
                 <a:solidFill>
                   <a:srgbClr val="999999"/>
                 </a:solidFill>
                 <a:latin typeface="Calibri"/>
               </a:rPr>
-              <a:t>16</a:t>
+              <a:t>1</a:t>
+            </a:r>
+            <a:r>
+              <a:rPr lang="en-GB" sz="950" b="0" i="0" dirty="0">
+                <a:solidFill>
+                  <a:srgbClr val="999999"/>
+                </a:solidFill>
+                <a:latin typeface="Calibri"/>
+              </a:rPr>
+              <a:t>8</a:t>
+            </a:r>
+            <a:endParaRPr sz="950" b="0" i="0" dirty="0">
+              <a:solidFill>
+                <a:srgbClr val="999999"/>
+              </a:solidFill>
+              <a:latin typeface="Calibri"/>
+            </a:endParaRPr>
+          </a:p>
+        </p:txBody>
+      </p:sp>
+      <p:sp>
+        <p:nvSpPr>
+          <p:cNvPr id="22" name="TextBox 21"/>
+          <p:cNvSpPr txBox="1"/>
+          <p:nvPr/>
+        </p:nvSpPr>
+        <p:spPr>
+          <a:xfrm>
+            <a:off x="685800" y="3352876"/>
+            <a:ext cx="10515600" cy="1200329"/>
+          </a:xfrm>
+          <a:prstGeom prst="rect">
+            <a:avLst/>
+          </a:prstGeom>
+          <a:noFill/>
+        </p:spPr>
+        <p:txBody>
+          <a:bodyPr wrap="square">
+            <a:spAutoFit/>
+          </a:bodyPr>
+          <a:lstStyle/>
+          <a:p>
+            <a:r>
+              <a:rPr sz="2400" b="1" dirty="0">
+                <a:solidFill>
+                  <a:srgbClr val="C9748F"/>
+                </a:solidFill>
+                <a:latin typeface="Calibri"/>
+              </a:rPr>
+              <a:t>CONTRIBUTION</a:t>
+            </a:r>
+            <a:endParaRPr lang="en-GB" sz="2400" b="1" dirty="0">
+              <a:solidFill>
+                <a:srgbClr val="C9748F"/>
+              </a:solidFill>
+            </a:endParaRPr>
+          </a:p>
+          <a:p>
+            <a:r>
+              <a:rPr lang="en-GB" sz="1600" dirty="0"/>
+              <a:t>The key contribution is not a single fairer model, but a reusable framework for assessing AI fairness. By translating justice theory into measurable criteria and communicating outcomes clearly, this approach provides a standard that future models can be evaluated against.</a:t>
+            </a:r>
+            <a:endParaRPr sz="1600" b="1" dirty="0">
+              <a:solidFill>
+                <a:srgbClr val="C9748F"/>
+              </a:solidFill>
+            </a:endParaRPr>
+          </a:p>
+        </p:txBody>
+      </p:sp>
+      <p:sp>
+        <p:nvSpPr>
+          <p:cNvPr id="23" name="TextBox 22"/>
+          <p:cNvSpPr txBox="1"/>
+          <p:nvPr/>
+        </p:nvSpPr>
+        <p:spPr>
+          <a:xfrm>
+            <a:off x="960120" y="5381243"/>
+            <a:ext cx="10515600" cy="307777"/>
+          </a:xfrm>
+          <a:prstGeom prst="rect">
+            <a:avLst/>
+          </a:prstGeom>
+          <a:noFill/>
+        </p:spPr>
+        <p:txBody>
+          <a:bodyPr wrap="square">
+            <a:spAutoFit/>
+          </a:bodyPr>
+          <a:lstStyle/>
+          <a:p>
+            <a:r>
+              <a:rPr lang="en-GB" sz="1400" dirty="0">
+                <a:solidFill>
+                  <a:srgbClr val="7B2D4E"/>
+                </a:solidFill>
+              </a:rPr>
+              <a:t>Fairness isn't fixed where the model is built. It's determined upstream, in the data, and downstream, in whether a decision can be questioned</a:t>
+            </a:r>
+            <a:endParaRPr sz="1400" dirty="0">
+              <a:solidFill>
+                <a:srgbClr val="7B2D4E"/>
+              </a:solidFill>
+              <a:latin typeface="Calibri"/>
+            </a:endParaRPr>
+          </a:p>
+        </p:txBody>
+      </p:sp>
+      <p:sp>
+        <p:nvSpPr>
+          <p:cNvPr id="5" name="TextBox 4">
+            <a:extLst>
+              <a:ext uri="{FF2B5EF4-FFF2-40B4-BE49-F238E27FC236}">
+                <a16:creationId xmlns:a16="http://schemas.microsoft.com/office/drawing/2014/main" id="{483406BD-1F72-4D51-60E2-418D530DBF2C}"/>
+              </a:ext>
+            </a:extLst>
+          </p:cNvPr>
+          <p:cNvSpPr txBox="1"/>
+          <p:nvPr/>
+        </p:nvSpPr>
+        <p:spPr>
+          <a:xfrm>
+            <a:off x="685800" y="2254403"/>
+            <a:ext cx="9733336" cy="954107"/>
+          </a:xfrm>
+          <a:prstGeom prst="rect">
+            <a:avLst/>
+          </a:prstGeom>
+          <a:noFill/>
+        </p:spPr>
+        <p:txBody>
+          <a:bodyPr wrap="square" rtlCol="0">
+            <a:spAutoFit/>
+          </a:bodyPr>
+          <a:lstStyle/>
+          <a:p>
+            <a:r>
+              <a:rPr lang="en-GB" sz="2400" b="1" dirty="0">
+                <a:solidFill>
+                  <a:srgbClr val="C9748F"/>
+                </a:solidFill>
+                <a:latin typeface="+mj-lt"/>
+              </a:rPr>
+              <a:t>FINDING </a:t>
+            </a:r>
+          </a:p>
+          <a:p>
+            <a:r>
+              <a:rPr lang="en-GB" sz="1600" dirty="0"/>
+              <a:t>Mitigation improved the model’s behaviour, but it could not add missing patients to the data or clinician override to the pipeline.</a:t>
             </a:r>
           </a:p>
         </p:txBody>
@@ -17382,7 +16980,7 @@
         <p:spPr>
           <a:xfrm>
             <a:off x="11521440" y="6510528"/>
-            <a:ext cx="457200" cy="274320"/>
+            <a:ext cx="457200" cy="146194"/>
           </a:xfrm>
           <a:prstGeom prst="rect">
             <a:avLst/>
@@ -17401,14 +16999,20 @@
               </a:lnSpc>
             </a:pPr>
             <a:r>
-              <a:rPr sz="950" b="0" i="0">
+              <a:rPr lang="en-GB" sz="950" dirty="0">
                 <a:solidFill>
                   <a:srgbClr val="999999"/>
                 </a:solidFill>
                 <a:latin typeface="Calibri"/>
               </a:rPr>
-              <a:t>3</a:t>
-            </a:r>
+              <a:t>4</a:t>
+            </a:r>
+            <a:endParaRPr sz="950" b="0" i="0" dirty="0">
+              <a:solidFill>
+                <a:srgbClr val="999999"/>
+              </a:solidFill>
+              <a:latin typeface="Calibri"/>
+            </a:endParaRPr>
           </a:p>
         </p:txBody>
       </p:sp>
@@ -20009,44 +19613,6 @@
       </p:sp>
       <p:sp>
         <p:nvSpPr>
-          <p:cNvPr id="62" name="Text 60"/>
-          <p:cNvSpPr/>
-          <p:nvPr/>
-        </p:nvSpPr>
-        <p:spPr>
-          <a:xfrm>
-            <a:off x="11385352" y="6337300"/>
-            <a:ext cx="158949" cy="165100"/>
-          </a:xfrm>
-          <a:prstGeom prst="rect">
-            <a:avLst/>
-          </a:prstGeom>
-          <a:noFill/>
-          <a:ln/>
-        </p:spPr>
-        <p:txBody>
-          <a:bodyPr wrap="square" lIns="16933" tIns="16933" rIns="16933" bIns="16933" rtlCol="0" anchor="t">
-            <a:normAutofit/>
-          </a:bodyPr>
-          <a:lstStyle/>
-          <a:p>
-            <a:r>
-              <a:rPr lang="en-US" sz="800" b="1" dirty="0">
-                <a:solidFill>
-                  <a:srgbClr val="999999"/>
-                </a:solidFill>
-                <a:latin typeface="Manrope" pitchFamily="34" charset="0"/>
-                <a:ea typeface="Manrope" pitchFamily="34" charset="-122"/>
-                <a:cs typeface="Manrope" pitchFamily="34" charset="-120"/>
-              </a:rPr>
-              <a:t>01</a:t>
-            </a:r>
-            <a:endParaRPr lang="en-US" sz="800" dirty="0"/>
-          </a:p>
-        </p:txBody>
-      </p:sp>
-      <p:sp>
-        <p:nvSpPr>
           <p:cNvPr id="64" name="TextBox 63">
             <a:extLst>
               <a:ext uri="{FF2B5EF4-FFF2-40B4-BE49-F238E27FC236}">
@@ -20087,6 +19653,57 @@
               </a:rPr>
               <a:t>METHODOLOGY</a:t>
             </a:r>
+          </a:p>
+        </p:txBody>
+      </p:sp>
+      <p:sp>
+        <p:nvSpPr>
+          <p:cNvPr id="3" name="TextBox 2">
+            <a:extLst>
+              <a:ext uri="{FF2B5EF4-FFF2-40B4-BE49-F238E27FC236}">
+                <a16:creationId xmlns:a16="http://schemas.microsoft.com/office/drawing/2014/main" id="{C37813BD-92FE-DC53-E8BD-ABE88C1DCE10}"/>
+              </a:ext>
+            </a:extLst>
+          </p:cNvPr>
+          <p:cNvSpPr txBox="1"/>
+          <p:nvPr/>
+        </p:nvSpPr>
+        <p:spPr>
+          <a:xfrm>
+            <a:off x="11521440" y="6510528"/>
+            <a:ext cx="457200" cy="146194"/>
+          </a:xfrm>
+          <a:prstGeom prst="rect">
+            <a:avLst/>
+          </a:prstGeom>
+          <a:noFill/>
+        </p:spPr>
+        <p:txBody>
+          <a:bodyPr wrap="square" lIns="0" tIns="0" rIns="0" bIns="0" anchor="t">
+            <a:spAutoFit/>
+          </a:bodyPr>
+          <a:lstStyle/>
+          <a:p>
+            <a:pPr algn="r">
+              <a:lnSpc>
+                <a:spcPct val="100000"/>
+              </a:lnSpc>
+            </a:pPr>
+            <a:r>
+              <a:rPr lang="en-GB" sz="950" b="0" i="0" dirty="0">
+                <a:solidFill>
+                  <a:srgbClr val="999999"/>
+                </a:solidFill>
+                <a:latin typeface="Calibri"/>
+              </a:rPr>
+              <a:t>5</a:t>
+            </a:r>
+            <a:endParaRPr sz="950" b="0" i="0" dirty="0">
+              <a:solidFill>
+                <a:srgbClr val="999999"/>
+              </a:solidFill>
+              <a:latin typeface="Calibri"/>
+            </a:endParaRPr>
           </a:p>
         </p:txBody>
       </p:sp>
@@ -21454,7 +21071,7 @@
         <p:spPr>
           <a:xfrm>
             <a:off x="11521440" y="6510528"/>
-            <a:ext cx="457200" cy="274320"/>
+            <a:ext cx="457200" cy="146194"/>
           </a:xfrm>
           <a:prstGeom prst="rect">
             <a:avLst/>
@@ -21473,14 +21090,20 @@
               </a:lnSpc>
             </a:pPr>
             <a:r>
-              <a:rPr sz="950" b="0" i="0">
+              <a:rPr lang="en-GB" sz="950" dirty="0">
                 <a:solidFill>
                   <a:srgbClr val="999999"/>
                 </a:solidFill>
                 <a:latin typeface="Calibri"/>
               </a:rPr>
-              <a:t>4</a:t>
-            </a:r>
+              <a:t>6</a:t>
+            </a:r>
+            <a:endParaRPr sz="950" b="0" i="0" dirty="0">
+              <a:solidFill>
+                <a:srgbClr val="999999"/>
+              </a:solidFill>
+              <a:latin typeface="Calibri"/>
+            </a:endParaRPr>
           </a:p>
         </p:txBody>
       </p:sp>
@@ -22051,7 +21674,7 @@
         <p:spPr>
           <a:xfrm>
             <a:off x="11521440" y="6510528"/>
-            <a:ext cx="457200" cy="274320"/>
+            <a:ext cx="457200" cy="146194"/>
           </a:xfrm>
           <a:prstGeom prst="rect">
             <a:avLst/>
@@ -22070,14 +21693,20 @@
               </a:lnSpc>
             </a:pPr>
             <a:r>
-              <a:rPr sz="950" b="0" i="0">
+              <a:rPr lang="en-GB" sz="950" dirty="0">
                 <a:solidFill>
                   <a:srgbClr val="999999"/>
                 </a:solidFill>
                 <a:latin typeface="Calibri"/>
               </a:rPr>
-              <a:t>4</a:t>
-            </a:r>
+              <a:t>7</a:t>
+            </a:r>
+            <a:endParaRPr sz="950" b="0" i="0" dirty="0">
+              <a:solidFill>
+                <a:srgbClr val="999999"/>
+              </a:solidFill>
+              <a:latin typeface="Calibri"/>
+            </a:endParaRPr>
           </a:p>
         </p:txBody>
       </p:sp>
@@ -23077,7 +22706,7 @@
         <p:spPr>
           <a:xfrm>
             <a:off x="11521440" y="6510528"/>
-            <a:ext cx="457200" cy="274320"/>
+            <a:ext cx="457200" cy="146194"/>
           </a:xfrm>
           <a:prstGeom prst="rect">
             <a:avLst/>
@@ -23096,14 +22725,20 @@
               </a:lnSpc>
             </a:pPr>
             <a:r>
-              <a:rPr sz="950" b="0" i="0">
+              <a:rPr lang="en-GB" sz="950" dirty="0">
                 <a:solidFill>
                   <a:srgbClr val="999999"/>
                 </a:solidFill>
                 <a:latin typeface="Calibri"/>
               </a:rPr>
-              <a:t>5</a:t>
-            </a:r>
+              <a:t>8</a:t>
+            </a:r>
+            <a:endParaRPr sz="950" b="0" i="0" dirty="0">
+              <a:solidFill>
+                <a:srgbClr val="999999"/>
+              </a:solidFill>
+              <a:latin typeface="Calibri"/>
+            </a:endParaRPr>
           </a:p>
         </p:txBody>
       </p:sp>
